--- a/Pregrado/Trabajo de grado 2/Clases/Sesion 08 - Instrumentos y plan de análisis (propuestos)/Presentacion.pptx
+++ b/Pregrado/Trabajo de grado 2/Clases/Sesion 08 - Instrumentos y plan de análisis (propuestos)/Presentacion.pptx
@@ -3366,41 +3366,6 @@
           </a:p>
         </p:txBody>
       </p:sp>
-      <p:sp>
-        <p:nvSpPr>
-          <p:cNvPr id="7" name="TextBox 6"/>
-          <p:cNvSpPr txBox="1"/>
-          <p:nvPr/>
-        </p:nvSpPr>
-        <p:spPr>
-          <a:xfrm>
-            <a:off x="2194560" y="6446520"/>
-            <a:ext cx="5943600" cy="274320"/>
-          </a:xfrm>
-          <a:prstGeom prst="rect">
-            <a:avLst/>
-          </a:prstGeom>
-          <a:noFill/>
-        </p:spPr>
-        <p:txBody>
-          <a:bodyPr wrap="square" anchor="t" lIns="0" rIns="0" tIns="0" bIns="0">
-            <a:spAutoFit/>
-          </a:bodyPr>
-          <a:lstStyle/>
-          <a:p>
-            <a:pPr algn="l"/>
-            <a:r>
-              <a:rPr sz="1000" b="1" i="0">
-                <a:solidFill>
-                  <a:srgbClr val="8F989D"/>
-                </a:solidFill>
-                <a:latin typeface="Calibri"/>
-              </a:rPr>
-              <a:t>Inicio 5:10 pm</a:t>
-            </a:r>
-          </a:p>
-        </p:txBody>
-      </p:sp>
     </p:spTree>
   </p:cSld>
   <p:clrMapOvr>
@@ -3773,41 +3738,6 @@
         </p:nvSpPr>
         <p:spPr>
           <a:xfrm>
-            <a:off x="2194560" y="6446520"/>
-            <a:ext cx="5943600" cy="274320"/>
-          </a:xfrm>
-          <a:prstGeom prst="rect">
-            <a:avLst/>
-          </a:prstGeom>
-          <a:noFill/>
-        </p:spPr>
-        <p:txBody>
-          <a:bodyPr wrap="square" anchor="t" lIns="0" rIns="0" tIns="0" bIns="0">
-            <a:spAutoFit/>
-          </a:bodyPr>
-          <a:lstStyle/>
-          <a:p>
-            <a:pPr algn="l"/>
-            <a:r>
-              <a:rPr sz="1000" b="1" i="0">
-                <a:solidFill>
-                  <a:srgbClr val="8F989D"/>
-                </a:solidFill>
-                <a:latin typeface="Calibri"/>
-              </a:rPr>
-              <a:t>Inicio 5:10 pm</a:t>
-            </a:r>
-          </a:p>
-        </p:txBody>
-      </p:sp>
-      <p:sp>
-        <p:nvSpPr>
-          <p:cNvPr id="6" name="TextBox 5"/>
-          <p:cNvSpPr txBox="1"/>
-          <p:nvPr/>
-        </p:nvSpPr>
-        <p:spPr>
-          <a:xfrm>
             <a:off x="11094415" y="6446520"/>
             <a:ext cx="548640" cy="274320"/>
           </a:xfrm>
@@ -4139,41 +4069,6 @@
       <p:sp>
         <p:nvSpPr>
           <p:cNvPr id="5" name="TextBox 4"/>
-          <p:cNvSpPr txBox="1"/>
-          <p:nvPr/>
-        </p:nvSpPr>
-        <p:spPr>
-          <a:xfrm>
-            <a:off x="2194560" y="6446520"/>
-            <a:ext cx="5943600" cy="274320"/>
-          </a:xfrm>
-          <a:prstGeom prst="rect">
-            <a:avLst/>
-          </a:prstGeom>
-          <a:noFill/>
-        </p:spPr>
-        <p:txBody>
-          <a:bodyPr wrap="square" anchor="t" lIns="0" rIns="0" tIns="0" bIns="0">
-            <a:spAutoFit/>
-          </a:bodyPr>
-          <a:lstStyle/>
-          <a:p>
-            <a:pPr algn="l"/>
-            <a:r>
-              <a:rPr sz="1000" b="1" i="0">
-                <a:solidFill>
-                  <a:srgbClr val="8F989D"/>
-                </a:solidFill>
-                <a:latin typeface="Calibri"/>
-              </a:rPr>
-              <a:t>Inicio 5:10 pm</a:t>
-            </a:r>
-          </a:p>
-        </p:txBody>
-      </p:sp>
-      <p:sp>
-        <p:nvSpPr>
-          <p:cNvPr id="6" name="TextBox 5"/>
           <p:cNvSpPr txBox="1"/>
           <p:nvPr/>
         </p:nvSpPr>
@@ -4945,41 +4840,6 @@
         </p:nvSpPr>
         <p:spPr>
           <a:xfrm>
-            <a:off x="2194560" y="6446520"/>
-            <a:ext cx="5943600" cy="274320"/>
-          </a:xfrm>
-          <a:prstGeom prst="rect">
-            <a:avLst/>
-          </a:prstGeom>
-          <a:noFill/>
-        </p:spPr>
-        <p:txBody>
-          <a:bodyPr wrap="square" anchor="t" lIns="0" rIns="0" tIns="0" bIns="0">
-            <a:spAutoFit/>
-          </a:bodyPr>
-          <a:lstStyle/>
-          <a:p>
-            <a:pPr algn="l"/>
-            <a:r>
-              <a:rPr sz="1000" b="1" i="0">
-                <a:solidFill>
-                  <a:srgbClr val="8F989D"/>
-                </a:solidFill>
-                <a:latin typeface="Calibri"/>
-              </a:rPr>
-              <a:t>Inicio 5:10 pm</a:t>
-            </a:r>
-          </a:p>
-        </p:txBody>
-      </p:sp>
-      <p:sp>
-        <p:nvSpPr>
-          <p:cNvPr id="7" name="TextBox 6"/>
-          <p:cNvSpPr txBox="1"/>
-          <p:nvPr/>
-        </p:nvSpPr>
-        <p:spPr>
-          <a:xfrm>
             <a:off x="11094415" y="6446520"/>
             <a:ext cx="548640" cy="274320"/>
           </a:xfrm>
@@ -5420,41 +5280,6 @@
         </p:nvSpPr>
         <p:spPr>
           <a:xfrm>
-            <a:off x="2194560" y="6446520"/>
-            <a:ext cx="5943600" cy="274320"/>
-          </a:xfrm>
-          <a:prstGeom prst="rect">
-            <a:avLst/>
-          </a:prstGeom>
-          <a:noFill/>
-        </p:spPr>
-        <p:txBody>
-          <a:bodyPr wrap="square" anchor="t" lIns="0" rIns="0" tIns="0" bIns="0">
-            <a:spAutoFit/>
-          </a:bodyPr>
-          <a:lstStyle/>
-          <a:p>
-            <a:pPr algn="l"/>
-            <a:r>
-              <a:rPr sz="1000" b="1" i="0">
-                <a:solidFill>
-                  <a:srgbClr val="8F989D"/>
-                </a:solidFill>
-                <a:latin typeface="Calibri"/>
-              </a:rPr>
-              <a:t>Inicio 5:10 pm</a:t>
-            </a:r>
-          </a:p>
-        </p:txBody>
-      </p:sp>
-      <p:sp>
-        <p:nvSpPr>
-          <p:cNvPr id="11" name="TextBox 10"/>
-          <p:cNvSpPr txBox="1"/>
-          <p:nvPr/>
-        </p:nvSpPr>
-        <p:spPr>
-          <a:xfrm>
             <a:off x="11094415" y="6446520"/>
             <a:ext cx="548640" cy="274320"/>
           </a:xfrm>
@@ -5707,41 +5532,6 @@
         </p:nvSpPr>
         <p:spPr>
           <a:xfrm>
-            <a:off x="2194560" y="6446520"/>
-            <a:ext cx="5943600" cy="274320"/>
-          </a:xfrm>
-          <a:prstGeom prst="rect">
-            <a:avLst/>
-          </a:prstGeom>
-          <a:noFill/>
-        </p:spPr>
-        <p:txBody>
-          <a:bodyPr wrap="square" anchor="t" lIns="0" rIns="0" tIns="0" bIns="0">
-            <a:spAutoFit/>
-          </a:bodyPr>
-          <a:lstStyle/>
-          <a:p>
-            <a:pPr algn="l"/>
-            <a:r>
-              <a:rPr sz="1000" b="1" i="0">
-                <a:solidFill>
-                  <a:srgbClr val="8F989D"/>
-                </a:solidFill>
-                <a:latin typeface="Calibri"/>
-              </a:rPr>
-              <a:t>Inicio 5:10 pm</a:t>
-            </a:r>
-          </a:p>
-        </p:txBody>
-      </p:sp>
-      <p:sp>
-        <p:nvSpPr>
-          <p:cNvPr id="7" name="TextBox 6"/>
-          <p:cNvSpPr txBox="1"/>
-          <p:nvPr/>
-        </p:nvSpPr>
-        <p:spPr>
-          <a:xfrm>
             <a:off x="11094415" y="6446520"/>
             <a:ext cx="548640" cy="274320"/>
           </a:xfrm>
@@ -6213,41 +6003,6 @@
         </p:nvSpPr>
         <p:spPr>
           <a:xfrm>
-            <a:off x="2194560" y="6446520"/>
-            <a:ext cx="5943600" cy="274320"/>
-          </a:xfrm>
-          <a:prstGeom prst="rect">
-            <a:avLst/>
-          </a:prstGeom>
-          <a:noFill/>
-        </p:spPr>
-        <p:txBody>
-          <a:bodyPr wrap="square" anchor="t" lIns="0" rIns="0" tIns="0" bIns="0">
-            <a:spAutoFit/>
-          </a:bodyPr>
-          <a:lstStyle/>
-          <a:p>
-            <a:pPr algn="l"/>
-            <a:r>
-              <a:rPr sz="1000" b="1" i="0">
-                <a:solidFill>
-                  <a:srgbClr val="8F989D"/>
-                </a:solidFill>
-                <a:latin typeface="Calibri"/>
-              </a:rPr>
-              <a:t>Inicio 5:10 pm</a:t>
-            </a:r>
-          </a:p>
-        </p:txBody>
-      </p:sp>
-      <p:sp>
-        <p:nvSpPr>
-          <p:cNvPr id="6" name="TextBox 5"/>
-          <p:cNvSpPr txBox="1"/>
-          <p:nvPr/>
-        </p:nvSpPr>
-        <p:spPr>
-          <a:xfrm>
             <a:off x="11094415" y="6446520"/>
             <a:ext cx="548640" cy="274320"/>
           </a:xfrm>
@@ -6277,7 +6032,7 @@
       </p:sp>
       <p:sp>
         <p:nvSpPr>
-          <p:cNvPr id="7" name="TextBox 6"/>
+          <p:cNvPr id="6" name="TextBox 5"/>
           <p:cNvSpPr txBox="1"/>
           <p:nvPr/>
         </p:nvSpPr>
@@ -6755,41 +6510,6 @@
         </p:nvSpPr>
         <p:spPr>
           <a:xfrm>
-            <a:off x="2194560" y="6446520"/>
-            <a:ext cx="5943600" cy="274320"/>
-          </a:xfrm>
-          <a:prstGeom prst="rect">
-            <a:avLst/>
-          </a:prstGeom>
-          <a:noFill/>
-        </p:spPr>
-        <p:txBody>
-          <a:bodyPr wrap="square" anchor="t" lIns="0" rIns="0" tIns="0" bIns="0">
-            <a:spAutoFit/>
-          </a:bodyPr>
-          <a:lstStyle/>
-          <a:p>
-            <a:pPr algn="l"/>
-            <a:r>
-              <a:rPr sz="1000" b="1" i="0">
-                <a:solidFill>
-                  <a:srgbClr val="8F989D"/>
-                </a:solidFill>
-                <a:latin typeface="Calibri"/>
-              </a:rPr>
-              <a:t>Inicio 5:10 pm</a:t>
-            </a:r>
-          </a:p>
-        </p:txBody>
-      </p:sp>
-      <p:sp>
-        <p:nvSpPr>
-          <p:cNvPr id="6" name="TextBox 5"/>
-          <p:cNvSpPr txBox="1"/>
-          <p:nvPr/>
-        </p:nvSpPr>
-        <p:spPr>
-          <a:xfrm>
             <a:off x="11094415" y="6446520"/>
             <a:ext cx="548640" cy="274320"/>
           </a:xfrm>
@@ -7081,41 +6801,6 @@
         </p:nvSpPr>
         <p:spPr>
           <a:xfrm>
-            <a:off x="2194560" y="6446520"/>
-            <a:ext cx="5943600" cy="274320"/>
-          </a:xfrm>
-          <a:prstGeom prst="rect">
-            <a:avLst/>
-          </a:prstGeom>
-          <a:noFill/>
-        </p:spPr>
-        <p:txBody>
-          <a:bodyPr wrap="square" anchor="t" lIns="0" rIns="0" tIns="0" bIns="0">
-            <a:spAutoFit/>
-          </a:bodyPr>
-          <a:lstStyle/>
-          <a:p>
-            <a:pPr algn="l"/>
-            <a:r>
-              <a:rPr sz="1000" b="1" i="0">
-                <a:solidFill>
-                  <a:srgbClr val="8F989D"/>
-                </a:solidFill>
-                <a:latin typeface="Calibri"/>
-              </a:rPr>
-              <a:t>Inicio 5:10 pm</a:t>
-            </a:r>
-          </a:p>
-        </p:txBody>
-      </p:sp>
-      <p:sp>
-        <p:nvSpPr>
-          <p:cNvPr id="6" name="TextBox 5"/>
-          <p:cNvSpPr txBox="1"/>
-          <p:nvPr/>
-        </p:nvSpPr>
-        <p:spPr>
-          <a:xfrm>
             <a:off x="11094415" y="6446520"/>
             <a:ext cx="548640" cy="274320"/>
           </a:xfrm>
@@ -7463,41 +7148,6 @@
         </p:nvSpPr>
         <p:spPr>
           <a:xfrm>
-            <a:off x="2194560" y="6446520"/>
-            <a:ext cx="5943600" cy="274320"/>
-          </a:xfrm>
-          <a:prstGeom prst="rect">
-            <a:avLst/>
-          </a:prstGeom>
-          <a:noFill/>
-        </p:spPr>
-        <p:txBody>
-          <a:bodyPr wrap="square" anchor="t" lIns="0" rIns="0" tIns="0" bIns="0">
-            <a:spAutoFit/>
-          </a:bodyPr>
-          <a:lstStyle/>
-          <a:p>
-            <a:pPr algn="l"/>
-            <a:r>
-              <a:rPr sz="1000" b="1" i="0">
-                <a:solidFill>
-                  <a:srgbClr val="8F989D"/>
-                </a:solidFill>
-                <a:latin typeface="Calibri"/>
-              </a:rPr>
-              <a:t>Inicio 5:10 pm</a:t>
-            </a:r>
-          </a:p>
-        </p:txBody>
-      </p:sp>
-      <p:sp>
-        <p:nvSpPr>
-          <p:cNvPr id="6" name="TextBox 5"/>
-          <p:cNvSpPr txBox="1"/>
-          <p:nvPr/>
-        </p:nvSpPr>
-        <p:spPr>
-          <a:xfrm>
             <a:off x="11094415" y="6446520"/>
             <a:ext cx="548640" cy="274320"/>
           </a:xfrm>
@@ -7744,41 +7394,6 @@
           </a:p>
         </p:txBody>
       </p:sp>
-      <p:sp>
-        <p:nvSpPr>
-          <p:cNvPr id="7" name="TextBox 6"/>
-          <p:cNvSpPr txBox="1"/>
-          <p:nvPr/>
-        </p:nvSpPr>
-        <p:spPr>
-          <a:xfrm>
-            <a:off x="2194560" y="6446520"/>
-            <a:ext cx="5943600" cy="274320"/>
-          </a:xfrm>
-          <a:prstGeom prst="rect">
-            <a:avLst/>
-          </a:prstGeom>
-          <a:noFill/>
-        </p:spPr>
-        <p:txBody>
-          <a:bodyPr wrap="square" anchor="t" lIns="0" rIns="0" tIns="0" bIns="0">
-            <a:spAutoFit/>
-          </a:bodyPr>
-          <a:lstStyle/>
-          <a:p>
-            <a:pPr algn="l"/>
-            <a:r>
-              <a:rPr sz="1000" b="1" i="0">
-                <a:solidFill>
-                  <a:srgbClr val="8F989D"/>
-                </a:solidFill>
-                <a:latin typeface="Calibri"/>
-              </a:rPr>
-              <a:t>Inicio 5:10 pm</a:t>
-            </a:r>
-          </a:p>
-        </p:txBody>
-      </p:sp>
     </p:spTree>
   </p:cSld>
   <p:clrMapOvr>
@@ -8108,41 +7723,6 @@
         </p:nvSpPr>
         <p:spPr>
           <a:xfrm>
-            <a:off x="2194560" y="6446520"/>
-            <a:ext cx="5943600" cy="274320"/>
-          </a:xfrm>
-          <a:prstGeom prst="rect">
-            <a:avLst/>
-          </a:prstGeom>
-          <a:noFill/>
-        </p:spPr>
-        <p:txBody>
-          <a:bodyPr wrap="square" anchor="t" lIns="0" rIns="0" tIns="0" bIns="0">
-            <a:spAutoFit/>
-          </a:bodyPr>
-          <a:lstStyle/>
-          <a:p>
-            <a:pPr algn="l"/>
-            <a:r>
-              <a:rPr sz="1000" b="1" i="0">
-                <a:solidFill>
-                  <a:srgbClr val="8F989D"/>
-                </a:solidFill>
-                <a:latin typeface="Calibri"/>
-              </a:rPr>
-              <a:t>Inicio 5:10 pm</a:t>
-            </a:r>
-          </a:p>
-        </p:txBody>
-      </p:sp>
-      <p:sp>
-        <p:nvSpPr>
-          <p:cNvPr id="6" name="TextBox 5"/>
-          <p:cNvSpPr txBox="1"/>
-          <p:nvPr/>
-        </p:nvSpPr>
-        <p:spPr>
-          <a:xfrm>
             <a:off x="11094415" y="6446520"/>
             <a:ext cx="548640" cy="274320"/>
           </a:xfrm>
@@ -8172,7 +7752,7 @@
       </p:sp>
       <p:sp>
         <p:nvSpPr>
-          <p:cNvPr id="7" name="TextBox 6"/>
+          <p:cNvPr id="6" name="TextBox 5"/>
           <p:cNvSpPr txBox="1"/>
           <p:nvPr/>
         </p:nvSpPr>
@@ -8555,41 +8135,6 @@
       <p:sp>
         <p:nvSpPr>
           <p:cNvPr id="5" name="TextBox 4"/>
-          <p:cNvSpPr txBox="1"/>
-          <p:nvPr/>
-        </p:nvSpPr>
-        <p:spPr>
-          <a:xfrm>
-            <a:off x="2194560" y="6446520"/>
-            <a:ext cx="5943600" cy="274320"/>
-          </a:xfrm>
-          <a:prstGeom prst="rect">
-            <a:avLst/>
-          </a:prstGeom>
-          <a:noFill/>
-        </p:spPr>
-        <p:txBody>
-          <a:bodyPr wrap="square" anchor="t" lIns="0" rIns="0" tIns="0" bIns="0">
-            <a:spAutoFit/>
-          </a:bodyPr>
-          <a:lstStyle/>
-          <a:p>
-            <a:pPr algn="l"/>
-            <a:r>
-              <a:rPr sz="1000" b="1" i="0">
-                <a:solidFill>
-                  <a:srgbClr val="8F989D"/>
-                </a:solidFill>
-                <a:latin typeface="Calibri"/>
-              </a:rPr>
-              <a:t>Inicio 5:10 pm</a:t>
-            </a:r>
-          </a:p>
-        </p:txBody>
-      </p:sp>
-      <p:sp>
-        <p:nvSpPr>
-          <p:cNvPr id="6" name="TextBox 5"/>
           <p:cNvSpPr txBox="1"/>
           <p:nvPr/>
         </p:nvSpPr>
@@ -9361,41 +8906,6 @@
         </p:nvSpPr>
         <p:spPr>
           <a:xfrm>
-            <a:off x="2194560" y="6446520"/>
-            <a:ext cx="5943600" cy="274320"/>
-          </a:xfrm>
-          <a:prstGeom prst="rect">
-            <a:avLst/>
-          </a:prstGeom>
-          <a:noFill/>
-        </p:spPr>
-        <p:txBody>
-          <a:bodyPr wrap="square" anchor="t" lIns="0" rIns="0" tIns="0" bIns="0">
-            <a:spAutoFit/>
-          </a:bodyPr>
-          <a:lstStyle/>
-          <a:p>
-            <a:pPr algn="l"/>
-            <a:r>
-              <a:rPr sz="1000" b="1" i="0">
-                <a:solidFill>
-                  <a:srgbClr val="8F989D"/>
-                </a:solidFill>
-                <a:latin typeface="Calibri"/>
-              </a:rPr>
-              <a:t>Inicio 5:10 pm</a:t>
-            </a:r>
-          </a:p>
-        </p:txBody>
-      </p:sp>
-      <p:sp>
-        <p:nvSpPr>
-          <p:cNvPr id="7" name="TextBox 6"/>
-          <p:cNvSpPr txBox="1"/>
-          <p:nvPr/>
-        </p:nvSpPr>
-        <p:spPr>
-          <a:xfrm>
             <a:off x="11094415" y="6446520"/>
             <a:ext cx="548640" cy="274320"/>
           </a:xfrm>
@@ -9725,41 +9235,6 @@
         </p:nvSpPr>
         <p:spPr>
           <a:xfrm>
-            <a:off x="2194560" y="6446520"/>
-            <a:ext cx="5943600" cy="274320"/>
-          </a:xfrm>
-          <a:prstGeom prst="rect">
-            <a:avLst/>
-          </a:prstGeom>
-          <a:noFill/>
-        </p:spPr>
-        <p:txBody>
-          <a:bodyPr wrap="square" anchor="t" lIns="0" rIns="0" tIns="0" bIns="0">
-            <a:spAutoFit/>
-          </a:bodyPr>
-          <a:lstStyle/>
-          <a:p>
-            <a:pPr algn="l"/>
-            <a:r>
-              <a:rPr sz="1000" b="1" i="0">
-                <a:solidFill>
-                  <a:srgbClr val="8F989D"/>
-                </a:solidFill>
-                <a:latin typeface="Calibri"/>
-              </a:rPr>
-              <a:t>Inicio 5:10 pm</a:t>
-            </a:r>
-          </a:p>
-        </p:txBody>
-      </p:sp>
-      <p:sp>
-        <p:nvSpPr>
-          <p:cNvPr id="6" name="TextBox 5"/>
-          <p:cNvSpPr txBox="1"/>
-          <p:nvPr/>
-        </p:nvSpPr>
-        <p:spPr>
-          <a:xfrm>
             <a:off x="11094415" y="6446520"/>
             <a:ext cx="548640" cy="274320"/>
           </a:xfrm>
@@ -10136,41 +9611,6 @@
       <p:sp>
         <p:nvSpPr>
           <p:cNvPr id="5" name="TextBox 4"/>
-          <p:cNvSpPr txBox="1"/>
-          <p:nvPr/>
-        </p:nvSpPr>
-        <p:spPr>
-          <a:xfrm>
-            <a:off x="2194560" y="6446520"/>
-            <a:ext cx="5943600" cy="274320"/>
-          </a:xfrm>
-          <a:prstGeom prst="rect">
-            <a:avLst/>
-          </a:prstGeom>
-          <a:noFill/>
-        </p:spPr>
-        <p:txBody>
-          <a:bodyPr wrap="square" anchor="t" lIns="0" rIns="0" tIns="0" bIns="0">
-            <a:spAutoFit/>
-          </a:bodyPr>
-          <a:lstStyle/>
-          <a:p>
-            <a:pPr algn="l"/>
-            <a:r>
-              <a:rPr sz="1000" b="1" i="0">
-                <a:solidFill>
-                  <a:srgbClr val="8F989D"/>
-                </a:solidFill>
-                <a:latin typeface="Calibri"/>
-              </a:rPr>
-              <a:t>Inicio 5:10 pm</a:t>
-            </a:r>
-          </a:p>
-        </p:txBody>
-      </p:sp>
-      <p:sp>
-        <p:nvSpPr>
-          <p:cNvPr id="6" name="TextBox 5"/>
           <p:cNvSpPr txBox="1"/>
           <p:nvPr/>
         </p:nvSpPr>
@@ -10942,41 +10382,6 @@
         </p:nvSpPr>
         <p:spPr>
           <a:xfrm>
-            <a:off x="2194560" y="6446520"/>
-            <a:ext cx="5943600" cy="274320"/>
-          </a:xfrm>
-          <a:prstGeom prst="rect">
-            <a:avLst/>
-          </a:prstGeom>
-          <a:noFill/>
-        </p:spPr>
-        <p:txBody>
-          <a:bodyPr wrap="square" anchor="t" lIns="0" rIns="0" tIns="0" bIns="0">
-            <a:spAutoFit/>
-          </a:bodyPr>
-          <a:lstStyle/>
-          <a:p>
-            <a:pPr algn="l"/>
-            <a:r>
-              <a:rPr sz="1000" b="1" i="0">
-                <a:solidFill>
-                  <a:srgbClr val="8F989D"/>
-                </a:solidFill>
-                <a:latin typeface="Calibri"/>
-              </a:rPr>
-              <a:t>Inicio 5:10 pm</a:t>
-            </a:r>
-          </a:p>
-        </p:txBody>
-      </p:sp>
-      <p:sp>
-        <p:nvSpPr>
-          <p:cNvPr id="7" name="TextBox 6"/>
-          <p:cNvSpPr txBox="1"/>
-          <p:nvPr/>
-        </p:nvSpPr>
-        <p:spPr>
-          <a:xfrm>
             <a:off x="11094415" y="6446520"/>
             <a:ext cx="548640" cy="274320"/>
           </a:xfrm>
@@ -11389,41 +10794,6 @@
       <p:sp>
         <p:nvSpPr>
           <p:cNvPr id="5" name="TextBox 4"/>
-          <p:cNvSpPr txBox="1"/>
-          <p:nvPr/>
-        </p:nvSpPr>
-        <p:spPr>
-          <a:xfrm>
-            <a:off x="2194560" y="6446520"/>
-            <a:ext cx="5943600" cy="274320"/>
-          </a:xfrm>
-          <a:prstGeom prst="rect">
-            <a:avLst/>
-          </a:prstGeom>
-          <a:noFill/>
-        </p:spPr>
-        <p:txBody>
-          <a:bodyPr wrap="square" anchor="t" lIns="0" rIns="0" tIns="0" bIns="0">
-            <a:spAutoFit/>
-          </a:bodyPr>
-          <a:lstStyle/>
-          <a:p>
-            <a:pPr algn="l"/>
-            <a:r>
-              <a:rPr sz="1000" b="1" i="0">
-                <a:solidFill>
-                  <a:srgbClr val="8F989D"/>
-                </a:solidFill>
-                <a:latin typeface="Calibri"/>
-              </a:rPr>
-              <a:t>Inicio 5:10 pm</a:t>
-            </a:r>
-          </a:p>
-        </p:txBody>
-      </p:sp>
-      <p:sp>
-        <p:nvSpPr>
-          <p:cNvPr id="6" name="TextBox 5"/>
           <p:cNvSpPr txBox="1"/>
           <p:nvPr/>
         </p:nvSpPr>
@@ -12056,41 +11426,6 @@
         </p:nvSpPr>
         <p:spPr>
           <a:xfrm>
-            <a:off x="2194560" y="6446520"/>
-            <a:ext cx="5943600" cy="274320"/>
-          </a:xfrm>
-          <a:prstGeom prst="rect">
-            <a:avLst/>
-          </a:prstGeom>
-          <a:noFill/>
-        </p:spPr>
-        <p:txBody>
-          <a:bodyPr wrap="square" anchor="t" lIns="0" rIns="0" tIns="0" bIns="0">
-            <a:spAutoFit/>
-          </a:bodyPr>
-          <a:lstStyle/>
-          <a:p>
-            <a:pPr algn="l"/>
-            <a:r>
-              <a:rPr sz="1000" b="1" i="0">
-                <a:solidFill>
-                  <a:srgbClr val="8F989D"/>
-                </a:solidFill>
-                <a:latin typeface="Calibri"/>
-              </a:rPr>
-              <a:t>Inicio 5:10 pm</a:t>
-            </a:r>
-          </a:p>
-        </p:txBody>
-      </p:sp>
-      <p:sp>
-        <p:nvSpPr>
-          <p:cNvPr id="7" name="TextBox 6"/>
-          <p:cNvSpPr txBox="1"/>
-          <p:nvPr/>
-        </p:nvSpPr>
-        <p:spPr>
-          <a:xfrm>
             <a:off x="11094415" y="6446520"/>
             <a:ext cx="548640" cy="274320"/>
           </a:xfrm>

--- a/Pregrado/Trabajo de grado 2/Clases/Sesion 08 - Instrumentos y plan de análisis (propuestos)/Presentacion.pptx
+++ b/Pregrado/Trabajo de grado 2/Clases/Sesion 08 - Instrumentos y plan de análisis (propuestos)/Presentacion.pptx
@@ -7067,7 +7067,7 @@
                 </a:solidFill>
                 <a:latin typeface="Calibri"/>
               </a:rPr>
-              <a:t> para dejar el instrumento pulido; revise la indicación de la sesión autónoma en CDigital.</a:t>
+              <a:t> para dejar el instrumento pulido; revise la indicación de la sesión autónoma en la carpeta de esa sesión del Drive de clases.</a:t>
             </a:r>
           </a:p>
           <a:p>

--- a/Pregrado/Trabajo de grado 2/Clases/Sesion 08 - Instrumentos y plan de análisis (propuestos)/Presentacion.pptx
+++ b/Pregrado/Trabajo de grado 2/Clases/Sesion 08 - Instrumentos y plan de análisis (propuestos)/Presentacion.pptx
@@ -24,6 +24,8 @@
     <p:sldId id="272" r:id="rId23"/>
     <p:sldId id="273" r:id="rId24"/>
     <p:sldId id="274" r:id="rId25"/>
+    <p:sldId id="275" r:id="rId26"/>
+    <p:sldId id="276" r:id="rId27"/>
   </p:sldIdLst>
   <p:sldSz cx="12191695" cy="6858000" type="screen4x3"/>
   <p:notesSz cx="6858000" cy="9144000"/>
@@ -5990,7 +5992,7 @@
                 </a:solidFill>
                 <a:latin typeface="Calibri"/>
               </a:rPr>
-              <a:t> — [URL CDigital — campus del curso pendiente].</a:t>
+              <a:t> — https://cdigital.cun.edu.co/course/view.php?id=129268.</a:t>
             </a:r>
           </a:p>
         </p:txBody>
@@ -6164,7 +6166,7 @@
                 </a:solidFill>
                 <a:latin typeface="Calibri"/>
               </a:rPr>
-              <a:t>TALLER — Operacionalización, instrumento y plan de análisis</a:t>
+              <a:t>TALLER · Operacionalización, instrumento y plan de análisis</a:t>
             </a:r>
           </a:p>
         </p:txBody>
@@ -6177,8 +6179,8 @@
         </p:nvSpPr>
         <p:spPr>
           <a:xfrm>
-            <a:off x="640080" y="1691639"/>
-            <a:ext cx="10911535" cy="4617720"/>
+            <a:off x="640080" y="1280160"/>
+            <a:ext cx="10911535" cy="411480"/>
           </a:xfrm>
           <a:prstGeom prst="rect">
             <a:avLst/>
@@ -6191,6 +6193,41 @@
           </a:bodyPr>
           <a:lstStyle/>
           <a:p>
+            <a:pPr algn="ctr"/>
+            <a:r>
+              <a:rPr sz="1500" b="0" i="0">
+                <a:solidFill>
+                  <a:srgbClr val="2B2B2B"/>
+                </a:solidFill>
+                <a:latin typeface="Calibri"/>
+              </a:rPr>
+              <a:t>Individual, con acompañamiento del Docente</a:t>
+            </a:r>
+          </a:p>
+        </p:txBody>
+      </p:sp>
+      <p:sp>
+        <p:nvSpPr>
+          <p:cNvPr id="5" name="TextBox 4"/>
+          <p:cNvSpPr txBox="1"/>
+          <p:nvPr/>
+        </p:nvSpPr>
+        <p:spPr>
+          <a:xfrm>
+            <a:off x="640080" y="2011679"/>
+            <a:ext cx="10911535" cy="4297680"/>
+          </a:xfrm>
+          <a:prstGeom prst="rect">
+            <a:avLst/>
+          </a:prstGeom>
+          <a:noFill/>
+        </p:spPr>
+        <p:txBody>
+          <a:bodyPr wrap="square" anchor="t" lIns="0" rIns="0" tIns="0" bIns="0">
+            <a:spAutoFit/>
+          </a:bodyPr>
+          <a:lstStyle/>
+          <a:p>
             <a:pPr>
               <a:spcAft>
                 <a:spcPts val="1000"/>
@@ -6212,16 +6249,16 @@
                 </a:solidFill>
                 <a:latin typeface="Calibri"/>
               </a:rPr>
-              <a:t>Tiempo:</a:t>
-            </a:r>
-            <a:r>
-              <a:rPr sz="1600" b="0" i="0">
-                <a:solidFill>
-                  <a:srgbClr val="2B2B2B"/>
-                </a:solidFill>
-                <a:latin typeface="Calibri"/>
-              </a:rPr>
-              <a:t> 20 minutos de trabajo individual, con acompañamiento del Docente.</a:t>
+              <a:t>Al final tiene:</a:t>
+            </a:r>
+            <a:r>
+              <a:rPr sz="1600" b="0" i="0">
+                <a:solidFill>
+                  <a:srgbClr val="2B2B2B"/>
+                </a:solidFill>
+                <a:latin typeface="Calibri"/>
+              </a:rPr>
+              <a:t> la tabla de operacionalización, su instrumento redactado y el plan de análisis.</a:t>
             </a:r>
           </a:p>
           <a:p>
@@ -6246,16 +6283,34 @@
                 </a:solidFill>
                 <a:latin typeface="Calibri"/>
               </a:rPr>
-              <a:t>Archivo:</a:t>
-            </a:r>
-            <a:r>
-              <a:rPr sz="1600" b="0" i="0">
-                <a:solidFill>
-                  <a:srgbClr val="2B2B2B"/>
-                </a:solidFill>
-                <a:latin typeface="Calibri"/>
-              </a:rPr>
-              <a:t> un documento en Google Docs llamado S08_Instrumentos_Apellido.</a:t>
+              <a:t>Paso 1</a:t>
+            </a:r>
+            <a:r>
+              <a:rPr sz="1600" b="0" i="0">
+                <a:solidFill>
+                  <a:srgbClr val="2B2B2B"/>
+                </a:solidFill>
+                <a:latin typeface="Calibri"/>
+              </a:rPr>
+              <a:t> · Complete la </a:t>
+            </a:r>
+            <a:r>
+              <a:rPr sz="1600" b="1" i="0">
+                <a:solidFill>
+                  <a:srgbClr val="2B2B2B"/>
+                </a:solidFill>
+                <a:latin typeface="Calibri"/>
+              </a:rPr>
+              <a:t>tabla de operacionalización</a:t>
+            </a:r>
+            <a:r>
+              <a:rPr sz="1600" b="0" i="0">
+                <a:solidFill>
+                  <a:srgbClr val="2B2B2B"/>
+                </a:solidFill>
+                <a:latin typeface="Calibri"/>
+              </a:rPr>
+              <a:t> —variable → dimensión → indicador → ítem— para al menos dos variables de su proyecto.</a:t>
             </a:r>
           </a:p>
           <a:p>
@@ -6280,16 +6335,16 @@
                 </a:solidFill>
                 <a:latin typeface="Calibri"/>
               </a:rPr>
-              <a:t>Consigna 1.</a:t>
-            </a:r>
-            <a:r>
-              <a:rPr sz="1600" b="0" i="0">
-                <a:solidFill>
-                  <a:srgbClr val="2B2B2B"/>
-                </a:solidFill>
-                <a:latin typeface="Calibri"/>
-              </a:rPr>
-              <a:t> Complete la </a:t>
+              <a:t>Paso 2</a:t>
+            </a:r>
+            <a:r>
+              <a:rPr sz="1600" b="0" i="0">
+                <a:solidFill>
+                  <a:srgbClr val="2B2B2B"/>
+                </a:solidFill>
+                <a:latin typeface="Calibri"/>
+              </a:rPr>
+              <a:t> · Redacte su </a:t>
             </a:r>
             <a:r>
               <a:rPr sz="1600" b="1" i="0">
@@ -6298,16 +6353,16 @@
                 </a:solidFill>
                 <a:latin typeface="Calibri"/>
               </a:rPr>
-              <a:t>tabla de operacionalización</a:t>
-            </a:r>
-            <a:r>
-              <a:rPr sz="1600" b="0" i="0">
-                <a:solidFill>
-                  <a:srgbClr val="2B2B2B"/>
-                </a:solidFill>
-                <a:latin typeface="Calibri"/>
-              </a:rPr>
-              <a:t> (variable → dimensión → indicador → ítem) para al menos dos variables de su proyecto.</a:t>
+              <a:t>instrumento</a:t>
+            </a:r>
+            <a:r>
+              <a:rPr sz="1600" b="0" i="0">
+                <a:solidFill>
+                  <a:srgbClr val="2B2B2B"/>
+                </a:solidFill>
+                <a:latin typeface="Calibri"/>
+              </a:rPr>
+              <a:t>: unos 10 ítems de encuesta, o una guía de unas 8 preguntas, o un protocolo de 5 a 8 casos de prueba.</a:t>
             </a:r>
           </a:p>
           <a:p>
@@ -6332,16 +6387,16 @@
                 </a:solidFill>
                 <a:latin typeface="Calibri"/>
               </a:rPr>
-              <a:t>Consigna 2.</a:t>
-            </a:r>
-            <a:r>
-              <a:rPr sz="1600" b="0" i="0">
-                <a:solidFill>
-                  <a:srgbClr val="2B2B2B"/>
-                </a:solidFill>
-                <a:latin typeface="Calibri"/>
-              </a:rPr>
-              <a:t> Redacte su </a:t>
+              <a:t>Paso 3</a:t>
+            </a:r>
+            <a:r>
+              <a:rPr sz="1600" b="0" i="0">
+                <a:solidFill>
+                  <a:srgbClr val="2B2B2B"/>
+                </a:solidFill>
+                <a:latin typeface="Calibri"/>
+              </a:rPr>
+              <a:t> · Escriba el </a:t>
             </a:r>
             <a:r>
               <a:rPr sz="1600" b="1" i="0">
@@ -6350,16 +6405,16 @@
                 </a:solidFill>
                 <a:latin typeface="Calibri"/>
               </a:rPr>
-              <a:t>instrumento</a:t>
-            </a:r>
-            <a:r>
-              <a:rPr sz="1600" b="0" i="0">
-                <a:solidFill>
-                  <a:srgbClr val="2B2B2B"/>
-                </a:solidFill>
-                <a:latin typeface="Calibri"/>
-              </a:rPr>
-              <a:t>: unos 10 ítems de encuesta, o una guía de unas 8 preguntas, o un protocolo de 5 a 8 casos de prueba.</a:t>
+              <a:t>plan de análisis</a:t>
+            </a:r>
+            <a:r>
+              <a:rPr sz="1600" b="0" i="0">
+                <a:solidFill>
+                  <a:srgbClr val="2B2B2B"/>
+                </a:solidFill>
+                <a:latin typeface="Calibri"/>
+              </a:rPr>
+              <a:t> en tabla: qué hará con cada tipo de dato y a qué objetivo responde.</a:t>
             </a:r>
           </a:p>
           <a:p>
@@ -6384,16 +6439,16 @@
                 </a:solidFill>
                 <a:latin typeface="Calibri"/>
               </a:rPr>
-              <a:t>Consigna 3.</a:t>
-            </a:r>
-            <a:r>
-              <a:rPr sz="1600" b="0" i="0">
-                <a:solidFill>
-                  <a:srgbClr val="2B2B2B"/>
-                </a:solidFill>
-                <a:latin typeface="Calibri"/>
-              </a:rPr>
-              <a:t> Escriba el </a:t>
+              <a:t>En clase, sin falta:</a:t>
+            </a:r>
+            <a:r>
+              <a:rPr sz="1600" b="0" i="0">
+                <a:solidFill>
+                  <a:srgbClr val="2B2B2B"/>
+                </a:solidFill>
+                <a:latin typeface="Calibri"/>
+              </a:rPr>
+              <a:t> los </a:t>
             </a:r>
             <a:r>
               <a:rPr sz="1600" b="1" i="0">
@@ -6402,109 +6457,23 @@
                 </a:solidFill>
                 <a:latin typeface="Calibri"/>
               </a:rPr>
-              <a:t>plan de análisis</a:t>
-            </a:r>
-            <a:r>
-              <a:rPr sz="1600" b="0" i="0">
-                <a:solidFill>
-                  <a:srgbClr val="2B2B2B"/>
-                </a:solidFill>
-                <a:latin typeface="Calibri"/>
-              </a:rPr>
-              <a:t> en tabla: qué hará con cada tipo de dato y a qué objetivo responde.</a:t>
-            </a:r>
-          </a:p>
-          <a:p>
-            <a:pPr>
-              <a:spcAft>
-                <a:spcPts val="1000"/>
-              </a:spcAft>
-            </a:pPr>
-            <a:r>
-              <a:rPr sz="1600" b="0" i="0">
-                <a:solidFill>
-                  <a:srgbClr val="2B2B2B"/>
-                </a:solidFill>
-                <a:latin typeface="Calibri"/>
-              </a:rPr>
-              <a:t>–   </a:t>
-            </a:r>
-            <a:r>
-              <a:rPr sz="1600" b="1" i="0">
-                <a:solidFill>
-                  <a:srgbClr val="2B2B2B"/>
-                </a:solidFill>
-                <a:latin typeface="Calibri"/>
-              </a:rPr>
-              <a:t>Criterio de éxito (verificable):</a:t>
-            </a:r>
-            <a:r>
-              <a:rPr sz="1600" b="0" i="0">
-                <a:solidFill>
-                  <a:srgbClr val="2B2B2B"/>
-                </a:solidFill>
-                <a:latin typeface="Calibri"/>
-              </a:rPr>
-              <a:t> cada ítem se rastrea a un objetivo por la tabla; cada objetivo tiene al menos un ítem; el plan de análisis no deja ningún dato sin destino.</a:t>
-            </a:r>
-          </a:p>
-          <a:p>
-            <a:pPr>
-              <a:spcAft>
-                <a:spcPts val="1000"/>
-              </a:spcAft>
-            </a:pPr>
-            <a:r>
-              <a:rPr sz="1600" b="0" i="0">
-                <a:solidFill>
-                  <a:srgbClr val="2B2B2B"/>
-                </a:solidFill>
-                <a:latin typeface="Calibri"/>
-              </a:rPr>
-              <a:t>–   </a:t>
-            </a:r>
-            <a:r>
-              <a:rPr sz="1600" b="1" i="0">
-                <a:solidFill>
-                  <a:srgbClr val="2B2B2B"/>
-                </a:solidFill>
-                <a:latin typeface="Calibri"/>
-              </a:rPr>
-              <a:t>Entrega:</a:t>
-            </a:r>
-            <a:r>
-              <a:rPr sz="1600" b="0" i="0">
-                <a:solidFill>
-                  <a:srgbClr val="2B2B2B"/>
-                </a:solidFill>
-                <a:latin typeface="Calibri"/>
-              </a:rPr>
-              <a:t> suba S08_Instrumentos_Apellido a </a:t>
-            </a:r>
-            <a:r>
-              <a:rPr sz="1600" b="1" i="0">
-                <a:solidFill>
-                  <a:srgbClr val="2B2B2B"/>
-                </a:solidFill>
-                <a:latin typeface="Calibri"/>
-              </a:rPr>
-              <a:t>CDigital</a:t>
-            </a:r>
-            <a:r>
-              <a:rPr sz="1600" b="0" i="0">
-                <a:solidFill>
-                  <a:srgbClr val="2B2B2B"/>
-                </a:solidFill>
-                <a:latin typeface="Calibri"/>
-              </a:rPr>
-              <a:t> — [URL CDigital — campus del curso pendiente].</a:t>
-            </a:r>
-          </a:p>
-        </p:txBody>
-      </p:sp>
-      <p:sp>
-        <p:nvSpPr>
-          <p:cNvPr id="5" name="TextBox 4"/>
+              <a:t>pasos 1 a 2</a:t>
+            </a:r>
+            <a:r>
+              <a:rPr sz="1600" b="0" i="0">
+                <a:solidFill>
+                  <a:srgbClr val="2B2B2B"/>
+                </a:solidFill>
+                <a:latin typeface="Calibri"/>
+              </a:rPr>
+              <a:t>. Del 3 en adelante puede quedar en trabajo autónomo, pero antes de la próxima sesión.</a:t>
+            </a:r>
+          </a:p>
+        </p:txBody>
+      </p:sp>
+      <p:sp>
+        <p:nvSpPr>
+          <p:cNvPr id="6" name="TextBox 5"/>
           <p:cNvSpPr txBox="1"/>
           <p:nvPr/>
         </p:nvSpPr>
@@ -6637,7 +6606,7 @@
                 </a:solidFill>
                 <a:latin typeface="Calibri"/>
               </a:rPr>
-              <a:t>Checklist de autoevaluación antes de entregar</a:t>
+              <a:t>TALLER · cómo se revisa y dónde se entrega</a:t>
             </a:r>
           </a:p>
         </p:txBody>
@@ -6650,8 +6619,8 @@
         </p:nvSpPr>
         <p:spPr>
           <a:xfrm>
-            <a:off x="640080" y="1691639"/>
-            <a:ext cx="10911535" cy="4617720"/>
+            <a:off x="640080" y="1280160"/>
+            <a:ext cx="10911535" cy="411480"/>
           </a:xfrm>
           <a:prstGeom prst="rect">
             <a:avLst/>
@@ -6664,6 +6633,41 @@
           </a:bodyPr>
           <a:lstStyle/>
           <a:p>
+            <a:pPr algn="ctr"/>
+            <a:r>
+              <a:rPr sz="1500" b="0" i="0">
+                <a:solidFill>
+                  <a:srgbClr val="2B2B2B"/>
+                </a:solidFill>
+                <a:latin typeface="Calibri"/>
+              </a:rPr>
+              <a:t>Operacionalización, instrumento y plan de análisis</a:t>
+            </a:r>
+          </a:p>
+        </p:txBody>
+      </p:sp>
+      <p:sp>
+        <p:nvSpPr>
+          <p:cNvPr id="5" name="TextBox 4"/>
+          <p:cNvSpPr txBox="1"/>
+          <p:nvPr/>
+        </p:nvSpPr>
+        <p:spPr>
+          <a:xfrm>
+            <a:off x="640080" y="2011679"/>
+            <a:ext cx="10911535" cy="4297680"/>
+          </a:xfrm>
+          <a:prstGeom prst="rect">
+            <a:avLst/>
+          </a:prstGeom>
+          <a:noFill/>
+        </p:spPr>
+        <p:txBody>
+          <a:bodyPr wrap="square" anchor="t" lIns="0" rIns="0" tIns="0" bIns="0">
+            <a:spAutoFit/>
+          </a:bodyPr>
+          <a:lstStyle/>
+          <a:p>
             <a:pPr>
               <a:spcAft>
                 <a:spcPts val="1000"/>
@@ -6676,7 +6680,118 @@
                 </a:solidFill>
                 <a:latin typeface="Calibri"/>
               </a:rPr>
-              <a:t>–   ¿Puedo señalar, para cada ítem, la fila de la tabla de la que nació?</a:t>
+              <a:t>–   </a:t>
+            </a:r>
+            <a:r>
+              <a:rPr sz="1600" b="1" i="0">
+                <a:solidFill>
+                  <a:srgbClr val="2B2B2B"/>
+                </a:solidFill>
+                <a:latin typeface="Calibri"/>
+              </a:rPr>
+              <a:t>Quedó bien si</a:t>
+            </a:r>
+            <a:r>
+              <a:rPr sz="1600" b="0" i="0">
+                <a:solidFill>
+                  <a:srgbClr val="2B2B2B"/>
+                </a:solidFill>
+                <a:latin typeface="Calibri"/>
+              </a:rPr>
+              <a:t> —compruébelo usted antes de cerrar el documento—:</a:t>
+            </a:r>
+          </a:p>
+          <a:p>
+            <a:pPr lvl="1">
+              <a:spcAft>
+                <a:spcPts val="600"/>
+              </a:spcAft>
+            </a:pPr>
+            <a:r>
+              <a:rPr sz="1500" b="0" i="0">
+                <a:solidFill>
+                  <a:srgbClr val="2B2B2B"/>
+                </a:solidFill>
+                <a:latin typeface="Calibri"/>
+              </a:rPr>
+              <a:t>●   </a:t>
+            </a:r>
+            <a:r>
+              <a:rPr sz="1500" b="1" i="0">
+                <a:solidFill>
+                  <a:srgbClr val="2B2B2B"/>
+                </a:solidFill>
+                <a:latin typeface="Calibri"/>
+              </a:rPr>
+              <a:t>Cada ítem se rastrea a un objetivo</a:t>
+            </a:r>
+            <a:r>
+              <a:rPr sz="1500" b="0" i="0">
+                <a:solidFill>
+                  <a:srgbClr val="2B2B2B"/>
+                </a:solidFill>
+                <a:latin typeface="Calibri"/>
+              </a:rPr>
+              <a:t> por la tabla.</a:t>
+            </a:r>
+          </a:p>
+          <a:p>
+            <a:pPr lvl="1">
+              <a:spcAft>
+                <a:spcPts val="600"/>
+              </a:spcAft>
+            </a:pPr>
+            <a:r>
+              <a:rPr sz="1500" b="0" i="0">
+                <a:solidFill>
+                  <a:srgbClr val="2B2B2B"/>
+                </a:solidFill>
+                <a:latin typeface="Calibri"/>
+              </a:rPr>
+              <a:t>●   </a:t>
+            </a:r>
+            <a:r>
+              <a:rPr sz="1500" b="1" i="0">
+                <a:solidFill>
+                  <a:srgbClr val="2B2B2B"/>
+                </a:solidFill>
+                <a:latin typeface="Calibri"/>
+              </a:rPr>
+              <a:t>Cada objetivo tiene al menos un ítem.</a:t>
+            </a:r>
+          </a:p>
+          <a:p>
+            <a:pPr lvl="1">
+              <a:spcAft>
+                <a:spcPts val="600"/>
+              </a:spcAft>
+            </a:pPr>
+            <a:r>
+              <a:rPr sz="1500" b="0" i="0">
+                <a:solidFill>
+                  <a:srgbClr val="2B2B2B"/>
+                </a:solidFill>
+                <a:latin typeface="Calibri"/>
+              </a:rPr>
+              <a:t>●   El plan de análisis </a:t>
+            </a:r>
+            <a:r>
+              <a:rPr sz="1500" b="1" i="0">
+                <a:solidFill>
+                  <a:srgbClr val="2B2B2B"/>
+                </a:solidFill>
+                <a:latin typeface="Calibri"/>
+              </a:rPr>
+              <a:t>no deja ningún dato sin destino</a:t>
+            </a:r>
+            <a:r>
+              <a:rPr sz="1500" b="0" i="0">
+                <a:solidFill>
+                  <a:srgbClr val="2B2B2B"/>
+                </a:solidFill>
+                <a:latin typeface="Calibri"/>
+              </a:rPr>
+              <a:t>.</a:t>
             </a:r>
           </a:p>
           <a:p>
@@ -6692,7 +6807,25 @@
                 </a:solidFill>
                 <a:latin typeface="Calibri"/>
               </a:rPr>
-              <a:t>–   ¿Algún objetivo específico se quedó sin ítems que lo alimenten?</a:t>
+              <a:t>–   </a:t>
+            </a:r>
+            <a:r>
+              <a:rPr sz="1600" b="1" i="0">
+                <a:solidFill>
+                  <a:srgbClr val="2B2B2B"/>
+                </a:solidFill>
+                <a:latin typeface="Calibri"/>
+              </a:rPr>
+              <a:t>Plan B:</a:t>
+            </a:r>
+            <a:r>
+              <a:rPr sz="1600" b="0" i="0">
+                <a:solidFill>
+                  <a:srgbClr val="2B2B2B"/>
+                </a:solidFill>
+                <a:latin typeface="Calibri"/>
+              </a:rPr>
+              <a:t> Si un indicador no le sugiere ningún ítem, es que todavía es una dimensión: bájelo un nivel hasta que se pueda preguntar u observar.</a:t>
             </a:r>
           </a:p>
           <a:p>
@@ -6708,7 +6841,43 @@
                 </a:solidFill>
                 <a:latin typeface="Calibri"/>
               </a:rPr>
-              <a:t>–   ¿Cada ítem contiene una sola idea, sin inducir la respuesta ni usar jerga técnica?</a:t>
+              <a:t>–   </a:t>
+            </a:r>
+            <a:r>
+              <a:rPr sz="1600" b="1" i="0">
+                <a:solidFill>
+                  <a:srgbClr val="2B2B2B"/>
+                </a:solidFill>
+                <a:latin typeface="Calibri"/>
+              </a:rPr>
+              <a:t>Hoy no se sube nada al aula:</a:t>
+            </a:r>
+            <a:r>
+              <a:rPr sz="1600" b="0" i="0">
+                <a:solidFill>
+                  <a:srgbClr val="2B2B2B"/>
+                </a:solidFill>
+                <a:latin typeface="Calibri"/>
+              </a:rPr>
+              <a:t> guarde `S08_Instrumentos_Apellido` (Google Doc o PDF) en su Drive y tráigalo a la próxima sesión. Es un </a:t>
+            </a:r>
+            <a:r>
+              <a:rPr sz="1600" b="1" i="0">
+                <a:solidFill>
+                  <a:srgbClr val="2B2B2B"/>
+                </a:solidFill>
+                <a:latin typeface="Calibri"/>
+              </a:rPr>
+              <a:t>avance formativo</a:t>
+            </a:r>
+            <a:r>
+              <a:rPr sz="1600" b="0" i="0">
+                <a:solidFill>
+                  <a:srgbClr val="2B2B2B"/>
+                </a:solidFill>
+                <a:latin typeface="Calibri"/>
+              </a:rPr>
+              <a:t>, se revisa en clase.</a:t>
             </a:r>
           </a:p>
           <a:p>
@@ -6724,78 +6893,104 @@
                 </a:solidFill>
                 <a:latin typeface="Calibri"/>
               </a:rPr>
-              <a:t>–   ¿La escala mantiene el mismo sentido en todos los ítems del bloque?</a:t>
-            </a:r>
-          </a:p>
-          <a:p>
-            <a:pPr>
-              <a:spcAft>
-                <a:spcPts val="1000"/>
-              </a:spcAft>
-            </a:pPr>
-            <a:r>
-              <a:rPr sz="1600" b="0" i="0">
-                <a:solidFill>
-                  <a:srgbClr val="2B2B2B"/>
-                </a:solidFill>
-                <a:latin typeface="Calibri"/>
-              </a:rPr>
-              <a:t>–   ¿Eliminé los datos personales que ningún análisis va a usar?</a:t>
-            </a:r>
-          </a:p>
-          <a:p>
-            <a:pPr>
-              <a:spcAft>
-                <a:spcPts val="1000"/>
-              </a:spcAft>
-            </a:pPr>
-            <a:r>
-              <a:rPr sz="1600" b="0" i="0">
-                <a:solidFill>
-                  <a:srgbClr val="2B2B2B"/>
-                </a:solidFill>
-                <a:latin typeface="Calibri"/>
-              </a:rPr>
-              <a:t>–   ¿El instrumento tiene propósito e instrucciones, no solo una lista de preguntas sueltas?</a:t>
-            </a:r>
-          </a:p>
-          <a:p>
-            <a:pPr>
-              <a:spcAft>
-                <a:spcPts val="1000"/>
-              </a:spcAft>
-            </a:pPr>
-            <a:r>
-              <a:rPr sz="1600" b="0" i="0">
-                <a:solidFill>
-                  <a:srgbClr val="2B2B2B"/>
-                </a:solidFill>
-                <a:latin typeface="Calibri"/>
-              </a:rPr>
-              <a:t>–   ¿El plan de análisis dice qué se hará con los datos numéricos, los categóricos y los textuales?</a:t>
-            </a:r>
-          </a:p>
-          <a:p>
-            <a:pPr>
-              <a:spcAft>
-                <a:spcPts val="1000"/>
-              </a:spcAft>
-            </a:pPr>
-            <a:r>
-              <a:rPr sz="1600" b="0" i="0">
-                <a:solidFill>
-                  <a:srgbClr val="2B2B2B"/>
-                </a:solidFill>
-                <a:latin typeface="Calibri"/>
-              </a:rPr>
-              <a:t>–   ¿Todo está redactado en propuesto y el archivo quedó cargado en CDigital?</a:t>
-            </a:r>
-          </a:p>
-        </p:txBody>
-      </p:sp>
-      <p:sp>
-        <p:nvSpPr>
-          <p:cNvPr id="5" name="TextBox 4"/>
+              <a:t>–   </a:t>
+            </a:r>
+            <a:r>
+              <a:rPr sz="1600" b="1" i="0">
+                <a:solidFill>
+                  <a:srgbClr val="2B2B2B"/>
+                </a:solidFill>
+                <a:latin typeface="Calibri"/>
+              </a:rPr>
+              <a:t>Esto alimenta:</a:t>
+            </a:r>
+            <a:r>
+              <a:rPr sz="1600" b="0" i="0">
+                <a:solidFill>
+                  <a:srgbClr val="2B2B2B"/>
+                </a:solidFill>
+                <a:latin typeface="Calibri"/>
+              </a:rPr>
+              <a:t> </a:t>
+            </a:r>
+            <a:r>
+              <a:rPr sz="1600" b="1" i="0">
+                <a:solidFill>
+                  <a:srgbClr val="2B2B2B"/>
+                </a:solidFill>
+                <a:latin typeface="Calibri"/>
+              </a:rPr>
+              <a:t>ACA Final</a:t>
+            </a:r>
+            <a:r>
+              <a:rPr sz="1600" b="0" i="0">
+                <a:solidFill>
+                  <a:srgbClr val="2B2B2B"/>
+                </a:solidFill>
+                <a:latin typeface="Calibri"/>
+              </a:rPr>
+              <a:t> —tarea, 32,8%—, el documento que </a:t>
+            </a:r>
+            <a:r>
+              <a:rPr sz="1600" b="1" i="0">
+                <a:solidFill>
+                  <a:srgbClr val="2B2B2B"/>
+                </a:solidFill>
+                <a:latin typeface="Calibri"/>
+              </a:rPr>
+              <a:t>sí</a:t>
+            </a:r>
+            <a:r>
+              <a:rPr sz="1600" b="0" i="0">
+                <a:solidFill>
+                  <a:srgbClr val="2B2B2B"/>
+                </a:solidFill>
+                <a:latin typeface="Calibri"/>
+              </a:rPr>
+              <a:t> recibe </a:t>
+            </a:r>
+            <a:r>
+              <a:rPr sz="1600" b="1" i="0">
+                <a:solidFill>
+                  <a:srgbClr val="2B2B2B"/>
+                </a:solidFill>
+                <a:latin typeface="Calibri"/>
+              </a:rPr>
+              <a:t>CDigital</a:t>
+            </a:r>
+            <a:r>
+              <a:rPr sz="1600" b="0" i="0">
+                <a:solidFill>
+                  <a:srgbClr val="2B2B2B"/>
+                </a:solidFill>
+                <a:latin typeface="Calibri"/>
+              </a:rPr>
+              <a:t>; cierra en la semana de la </a:t>
+            </a:r>
+            <a:r>
+              <a:rPr sz="1600" b="1" i="0">
+                <a:solidFill>
+                  <a:srgbClr val="2B2B2B"/>
+                </a:solidFill>
+                <a:latin typeface="Calibri"/>
+              </a:rPr>
+              <a:t>Sesión 11</a:t>
+            </a:r>
+            <a:r>
+              <a:rPr sz="1600" b="0" i="0">
+                <a:solidFill>
+                  <a:srgbClr val="2B2B2B"/>
+                </a:solidFill>
+                <a:latin typeface="Calibri"/>
+              </a:rPr>
+              <a:t>.</a:t>
+            </a:r>
+          </a:p>
+        </p:txBody>
+      </p:sp>
+      <p:sp>
+        <p:nvSpPr>
+          <p:cNvPr id="6" name="TextBox 5"/>
           <p:cNvSpPr txBox="1"/>
           <p:nvPr/>
         </p:nvSpPr>
@@ -6928,7 +7123,7 @@
                 </a:solidFill>
                 <a:latin typeface="Calibri"/>
               </a:rPr>
-              <a:t>Para continuar (trabajo autónomo)</a:t>
+              <a:t>Checklist de autoevaluación antes de entregar</a:t>
             </a:r>
           </a:p>
         </p:txBody>
@@ -6967,7 +7162,7 @@
                 </a:solidFill>
                 <a:latin typeface="Calibri"/>
               </a:rPr>
-              <a:t>–   Suba S08_Instrumentos_Apellido con la operacionalización, el instrumento y el plan de análisis.</a:t>
+              <a:t>–   ¿Puedo señalar, para cada ítem, la fila de la tabla de la que nació?</a:t>
             </a:r>
           </a:p>
           <a:p>
@@ -6983,7 +7178,7 @@
                 </a:solidFill>
                 <a:latin typeface="Calibri"/>
               </a:rPr>
-              <a:t>–   Pídale a un compañero que lea su instrumento y le marque los ítems que no entendió a la primera: esa es su prueba de escritorio.</a:t>
+              <a:t>–   ¿Algún objetivo específico se quedó sin ítems que lo alimenten?</a:t>
             </a:r>
           </a:p>
           <a:p>
@@ -6999,41 +7194,7 @@
                 </a:solidFill>
                 <a:latin typeface="Calibri"/>
               </a:rPr>
-              <a:t>–   Revise en </a:t>
-            </a:r>
-            <a:r>
-              <a:rPr sz="1600" b="1" i="0">
-                <a:solidFill>
-                  <a:srgbClr val="2B2B2B"/>
-                </a:solidFill>
-                <a:latin typeface="Calibri"/>
-              </a:rPr>
-              <a:t>Google Scholar</a:t>
-            </a:r>
-            <a:r>
-              <a:rPr sz="1600" b="0" i="0">
-                <a:solidFill>
-                  <a:srgbClr val="2B2B2B"/>
-                </a:solidFill>
-                <a:latin typeface="Calibri"/>
-              </a:rPr>
-              <a:t> un artículo que haya medido su misma variable y compare cómo la operacionalizó.</a:t>
-            </a:r>
-          </a:p>
-          <a:p>
-            <a:pPr lvl="1">
-              <a:spcAft>
-                <a:spcPts val="600"/>
-              </a:spcAft>
-            </a:pPr>
-            <a:r>
-              <a:rPr sz="1500" b="0" i="0">
-                <a:solidFill>
-                  <a:srgbClr val="2B2B2B"/>
-                </a:solidFill>
-                <a:latin typeface="Calibri"/>
-              </a:rPr>
-              <a:t>●   Copie la lógica de la medición, nunca los ítems textuales; y cite en APA 7 con ZoteroBib.</a:t>
+              <a:t>–   ¿Cada ítem contiene una sola idea, sin inducir la respuesta ni usar jerga técnica?</a:t>
             </a:r>
           </a:p>
           <a:p>
@@ -7049,25 +7210,7 @@
                 </a:solidFill>
                 <a:latin typeface="Calibri"/>
               </a:rPr>
-              <a:t>–   Aproveche la semana de </a:t>
-            </a:r>
-            <a:r>
-              <a:rPr sz="1600" b="1" i="0">
-                <a:solidFill>
-                  <a:srgbClr val="2B2B2B"/>
-                </a:solidFill>
-                <a:latin typeface="Calibri"/>
-              </a:rPr>
-              <a:t>trabajo autónomo</a:t>
-            </a:r>
-            <a:r>
-              <a:rPr sz="1600" b="0" i="0">
-                <a:solidFill>
-                  <a:srgbClr val="2B2B2B"/>
-                </a:solidFill>
-                <a:latin typeface="Calibri"/>
-              </a:rPr>
-              <a:t> para dejar el instrumento pulido; revise la indicación de la sesión autónoma en la carpeta de esa sesión del Drive de clases.</a:t>
+              <a:t>–   ¿La escala mantiene el mismo sentido en todos los ítems del bloque?</a:t>
             </a:r>
           </a:p>
           <a:p>
@@ -7083,59 +7226,55 @@
                 </a:solidFill>
                 <a:latin typeface="Calibri"/>
               </a:rPr>
-              <a:t>–   </a:t>
-            </a:r>
-            <a:r>
-              <a:rPr sz="1600" b="1" i="0">
-                <a:solidFill>
-                  <a:srgbClr val="2B2B2B"/>
-                </a:solidFill>
-                <a:latin typeface="Calibri"/>
-              </a:rPr>
-              <a:t>Próxima sesión:</a:t>
-            </a:r>
-            <a:r>
-              <a:rPr sz="1600" b="0" i="0">
-                <a:solidFill>
-                  <a:srgbClr val="2B2B2B"/>
-                </a:solidFill>
-                <a:latin typeface="Calibri"/>
-              </a:rPr>
-              <a:t> dejamos de escribir por partes y leemos el documento completo — </a:t>
-            </a:r>
-            <a:r>
-              <a:rPr sz="1600" b="1" i="0">
-                <a:solidFill>
-                  <a:srgbClr val="2B2B2B"/>
-                </a:solidFill>
-                <a:latin typeface="Calibri"/>
-              </a:rPr>
-              <a:t>integración del avance y corrección de gaps</a:t>
-            </a:r>
-            <a:r>
-              <a:rPr sz="1600" b="0" i="0">
-                <a:solidFill>
-                  <a:srgbClr val="2B2B2B"/>
-                </a:solidFill>
-                <a:latin typeface="Calibri"/>
-              </a:rPr>
-              <a:t>.</a:t>
-            </a:r>
-          </a:p>
-          <a:p>
-            <a:pPr lvl="1">
+              <a:t>–   ¿Eliminé los datos personales que ningún análisis va a usar?</a:t>
+            </a:r>
+          </a:p>
+          <a:p>
+            <a:pPr>
               <a:spcAft>
-                <a:spcPts val="600"/>
+                <a:spcPts val="1000"/>
               </a:spcAft>
             </a:pPr>
             <a:r>
-              <a:rPr sz="1500" b="0" i="0">
-                <a:solidFill>
-                  <a:srgbClr val="2B2B2B"/>
-                </a:solidFill>
-                <a:latin typeface="Calibri"/>
-              </a:rPr>
-              <a:t>●   Llegue con todas sus secciones pegadas en un solo documento, aunque tengan huecos.</a:t>
+              <a:rPr sz="1600" b="0" i="0">
+                <a:solidFill>
+                  <a:srgbClr val="2B2B2B"/>
+                </a:solidFill>
+                <a:latin typeface="Calibri"/>
+              </a:rPr>
+              <a:t>–   ¿El instrumento tiene propósito e instrucciones, no solo una lista de preguntas sueltas?</a:t>
+            </a:r>
+          </a:p>
+          <a:p>
+            <a:pPr>
+              <a:spcAft>
+                <a:spcPts val="1000"/>
+              </a:spcAft>
+            </a:pPr>
+            <a:r>
+              <a:rPr sz="1600" b="0" i="0">
+                <a:solidFill>
+                  <a:srgbClr val="2B2B2B"/>
+                </a:solidFill>
+                <a:latin typeface="Calibri"/>
+              </a:rPr>
+              <a:t>–   ¿El plan de análisis dice qué se hará con los datos numéricos, los categóricos y los textuales?</a:t>
+            </a:r>
+          </a:p>
+          <a:p>
+            <a:pPr>
+              <a:spcAft>
+                <a:spcPts val="1000"/>
+              </a:spcAft>
+            </a:pPr>
+            <a:r>
+              <a:rPr sz="1600" b="0" i="0">
+                <a:solidFill>
+                  <a:srgbClr val="2B2B2B"/>
+                </a:solidFill>
+                <a:latin typeface="Calibri"/>
+              </a:rPr>
+              <a:t>–   ¿Todo está redactado en propuesto y el archivo quedó cargado en CDigital?</a:t>
             </a:r>
           </a:p>
         </p:txBody>
@@ -7184,6 +7323,1951 @@
 </file>
 
 <file path=ppt/slides/slide19.xml><?xml version="1.0" encoding="utf-8"?>
+<p:sld xmlns:a="http://schemas.openxmlformats.org/drawingml/2006/main" xmlns:p="http://schemas.openxmlformats.org/presentationml/2006/main" xmlns:r="http://schemas.openxmlformats.org/officeDocument/2006/relationships">
+  <p:cSld>
+    <p:bg>
+      <p:bgPr>
+        <a:solidFill>
+          <a:srgbClr val="FFFFFF"/>
+        </a:solidFill>
+        <a:effectLst/>
+      </p:bgPr>
+    </p:bg>
+    <p:spTree>
+      <p:nvGrpSpPr>
+        <p:cNvPr id="1" name=""/>
+        <p:cNvGrpSpPr/>
+        <p:nvPr/>
+      </p:nvGrpSpPr>
+      <p:grpSpPr/>
+      <p:sp>
+        <p:nvSpPr>
+          <p:cNvPr id="2" name="Rectangle 1"/>
+          <p:cNvSpPr/>
+          <p:nvPr/>
+        </p:nvSpPr>
+        <p:spPr>
+          <a:xfrm>
+            <a:off x="0" y="0"/>
+            <a:ext cx="12191695" cy="1188720"/>
+          </a:xfrm>
+          <a:prstGeom prst="rect">
+            <a:avLst/>
+          </a:prstGeom>
+          <a:solidFill>
+            <a:srgbClr val="0C2340"/>
+          </a:solidFill>
+          <a:ln>
+            <a:noFill/>
+          </a:ln>
+          <a:effectLst/>
+        </p:spPr>
+        <p:style>
+          <a:lnRef idx="1">
+            <a:schemeClr val="accent1"/>
+          </a:lnRef>
+          <a:fillRef idx="3">
+            <a:schemeClr val="accent1"/>
+          </a:fillRef>
+          <a:effectRef idx="2">
+            <a:schemeClr val="accent1"/>
+          </a:effectRef>
+          <a:fontRef idx="minor">
+            <a:schemeClr val="lt1"/>
+          </a:fontRef>
+        </p:style>
+        <p:txBody>
+          <a:bodyPr rtlCol="0" anchor="ctr"/>
+          <a:lstStyle/>
+          <a:p>
+            <a:pPr algn="ctr"/>
+          </a:p>
+        </p:txBody>
+      </p:sp>
+      <p:sp>
+        <p:nvSpPr>
+          <p:cNvPr id="3" name="TextBox 2"/>
+          <p:cNvSpPr txBox="1"/>
+          <p:nvPr/>
+        </p:nvSpPr>
+        <p:spPr>
+          <a:xfrm>
+            <a:off x="640080" y="0"/>
+            <a:ext cx="9082735" cy="1188720"/>
+          </a:xfrm>
+          <a:prstGeom prst="rect">
+            <a:avLst/>
+          </a:prstGeom>
+          <a:noFill/>
+        </p:spPr>
+        <p:txBody>
+          <a:bodyPr wrap="square" anchor="ctr" lIns="0" rIns="0" tIns="0" bIns="0">
+            <a:spAutoFit/>
+          </a:bodyPr>
+          <a:lstStyle/>
+          <a:p>
+            <a:pPr algn="ctr"/>
+            <a:r>
+              <a:rPr sz="2600" b="1" i="0">
+                <a:solidFill>
+                  <a:srgbClr val="FFFFFF"/>
+                </a:solidFill>
+                <a:latin typeface="Calibri"/>
+              </a:rPr>
+              <a:t>Para continuar (trabajo autónomo)</a:t>
+            </a:r>
+          </a:p>
+        </p:txBody>
+      </p:sp>
+      <p:sp>
+        <p:nvSpPr>
+          <p:cNvPr id="4" name="TextBox 3"/>
+          <p:cNvSpPr txBox="1"/>
+          <p:nvPr/>
+        </p:nvSpPr>
+        <p:spPr>
+          <a:xfrm>
+            <a:off x="640080" y="1691639"/>
+            <a:ext cx="10911535" cy="4617720"/>
+          </a:xfrm>
+          <a:prstGeom prst="rect">
+            <a:avLst/>
+          </a:prstGeom>
+          <a:noFill/>
+        </p:spPr>
+        <p:txBody>
+          <a:bodyPr wrap="square" anchor="t" lIns="0" rIns="0" tIns="0" bIns="0">
+            <a:spAutoFit/>
+          </a:bodyPr>
+          <a:lstStyle/>
+          <a:p>
+            <a:pPr>
+              <a:spcAft>
+                <a:spcPts val="1000"/>
+              </a:spcAft>
+            </a:pPr>
+            <a:r>
+              <a:rPr sz="1600" b="0" i="0">
+                <a:solidFill>
+                  <a:srgbClr val="2B2B2B"/>
+                </a:solidFill>
+                <a:latin typeface="Calibri"/>
+              </a:rPr>
+              <a:t>–   Suba S08_Instrumentos_Apellido con la operacionalización, el instrumento y el plan de análisis.</a:t>
+            </a:r>
+          </a:p>
+          <a:p>
+            <a:pPr>
+              <a:spcAft>
+                <a:spcPts val="1000"/>
+              </a:spcAft>
+            </a:pPr>
+            <a:r>
+              <a:rPr sz="1600" b="0" i="0">
+                <a:solidFill>
+                  <a:srgbClr val="2B2B2B"/>
+                </a:solidFill>
+                <a:latin typeface="Calibri"/>
+              </a:rPr>
+              <a:t>–   Pídale a un compañero que lea su instrumento y le marque los ítems que no entendió a la primera: esa es su prueba de escritorio.</a:t>
+            </a:r>
+          </a:p>
+          <a:p>
+            <a:pPr>
+              <a:spcAft>
+                <a:spcPts val="1000"/>
+              </a:spcAft>
+            </a:pPr>
+            <a:r>
+              <a:rPr sz="1600" b="0" i="0">
+                <a:solidFill>
+                  <a:srgbClr val="2B2B2B"/>
+                </a:solidFill>
+                <a:latin typeface="Calibri"/>
+              </a:rPr>
+              <a:t>–   Revise en </a:t>
+            </a:r>
+            <a:r>
+              <a:rPr sz="1600" b="1" i="0">
+                <a:solidFill>
+                  <a:srgbClr val="2B2B2B"/>
+                </a:solidFill>
+                <a:latin typeface="Calibri"/>
+              </a:rPr>
+              <a:t>Google Scholar</a:t>
+            </a:r>
+            <a:r>
+              <a:rPr sz="1600" b="0" i="0">
+                <a:solidFill>
+                  <a:srgbClr val="2B2B2B"/>
+                </a:solidFill>
+                <a:latin typeface="Calibri"/>
+              </a:rPr>
+              <a:t> un artículo que haya medido su misma variable y compare cómo la operacionalizó.</a:t>
+            </a:r>
+          </a:p>
+          <a:p>
+            <a:pPr lvl="1">
+              <a:spcAft>
+                <a:spcPts val="600"/>
+              </a:spcAft>
+            </a:pPr>
+            <a:r>
+              <a:rPr sz="1500" b="0" i="0">
+                <a:solidFill>
+                  <a:srgbClr val="2B2B2B"/>
+                </a:solidFill>
+                <a:latin typeface="Calibri"/>
+              </a:rPr>
+              <a:t>●   Copie la lógica de la medición, nunca los ítems textuales; y cite en APA 7 con ZoteroBib.</a:t>
+            </a:r>
+          </a:p>
+          <a:p>
+            <a:pPr>
+              <a:spcAft>
+                <a:spcPts val="1000"/>
+              </a:spcAft>
+            </a:pPr>
+            <a:r>
+              <a:rPr sz="1600" b="0" i="0">
+                <a:solidFill>
+                  <a:srgbClr val="2B2B2B"/>
+                </a:solidFill>
+                <a:latin typeface="Calibri"/>
+              </a:rPr>
+              <a:t>–   Aproveche la semana de </a:t>
+            </a:r>
+            <a:r>
+              <a:rPr sz="1600" b="1" i="0">
+                <a:solidFill>
+                  <a:srgbClr val="2B2B2B"/>
+                </a:solidFill>
+                <a:latin typeface="Calibri"/>
+              </a:rPr>
+              <a:t>trabajo autónomo</a:t>
+            </a:r>
+            <a:r>
+              <a:rPr sz="1600" b="0" i="0">
+                <a:solidFill>
+                  <a:srgbClr val="2B2B2B"/>
+                </a:solidFill>
+                <a:latin typeface="Calibri"/>
+              </a:rPr>
+              <a:t> para dejar el instrumento pulido; revise la indicación de la sesión autónoma en la carpeta de esa sesión del Drive de clases.</a:t>
+            </a:r>
+          </a:p>
+          <a:p>
+            <a:pPr>
+              <a:spcAft>
+                <a:spcPts val="1000"/>
+              </a:spcAft>
+            </a:pPr>
+            <a:r>
+              <a:rPr sz="1600" b="0" i="0">
+                <a:solidFill>
+                  <a:srgbClr val="2B2B2B"/>
+                </a:solidFill>
+                <a:latin typeface="Calibri"/>
+              </a:rPr>
+              <a:t>–   </a:t>
+            </a:r>
+            <a:r>
+              <a:rPr sz="1600" b="1" i="0">
+                <a:solidFill>
+                  <a:srgbClr val="2B2B2B"/>
+                </a:solidFill>
+                <a:latin typeface="Calibri"/>
+              </a:rPr>
+              <a:t>Próxima sesión:</a:t>
+            </a:r>
+            <a:r>
+              <a:rPr sz="1600" b="0" i="0">
+                <a:solidFill>
+                  <a:srgbClr val="2B2B2B"/>
+                </a:solidFill>
+                <a:latin typeface="Calibri"/>
+              </a:rPr>
+              <a:t> dejamos de escribir por partes y leemos el documento completo — </a:t>
+            </a:r>
+            <a:r>
+              <a:rPr sz="1600" b="1" i="0">
+                <a:solidFill>
+                  <a:srgbClr val="2B2B2B"/>
+                </a:solidFill>
+                <a:latin typeface="Calibri"/>
+              </a:rPr>
+              <a:t>integración del avance y corrección de gaps</a:t>
+            </a:r>
+            <a:r>
+              <a:rPr sz="1600" b="0" i="0">
+                <a:solidFill>
+                  <a:srgbClr val="2B2B2B"/>
+                </a:solidFill>
+                <a:latin typeface="Calibri"/>
+              </a:rPr>
+              <a:t>.</a:t>
+            </a:r>
+          </a:p>
+          <a:p>
+            <a:pPr lvl="1">
+              <a:spcAft>
+                <a:spcPts val="600"/>
+              </a:spcAft>
+            </a:pPr>
+            <a:r>
+              <a:rPr sz="1500" b="0" i="0">
+                <a:solidFill>
+                  <a:srgbClr val="2B2B2B"/>
+                </a:solidFill>
+                <a:latin typeface="Calibri"/>
+              </a:rPr>
+              <a:t>●   Llegue con todas sus secciones pegadas en un solo documento, aunque tengan huecos.</a:t>
+            </a:r>
+          </a:p>
+        </p:txBody>
+      </p:sp>
+      <p:sp>
+        <p:nvSpPr>
+          <p:cNvPr id="5" name="TextBox 4"/>
+          <p:cNvSpPr txBox="1"/>
+          <p:nvPr/>
+        </p:nvSpPr>
+        <p:spPr>
+          <a:xfrm>
+            <a:off x="11094415" y="6446520"/>
+            <a:ext cx="548640" cy="274320"/>
+          </a:xfrm>
+          <a:prstGeom prst="rect">
+            <a:avLst/>
+          </a:prstGeom>
+          <a:noFill/>
+        </p:spPr>
+        <p:txBody>
+          <a:bodyPr wrap="square" anchor="t" lIns="0" rIns="0" tIns="0" bIns="0">
+            <a:spAutoFit/>
+          </a:bodyPr>
+          <a:lstStyle/>
+          <a:p>
+            <a:pPr algn="r"/>
+            <a:r>
+              <a:rPr sz="1000" b="1" i="0">
+                <a:solidFill>
+                  <a:srgbClr val="8F989D"/>
+                </a:solidFill>
+                <a:latin typeface="Calibri"/>
+              </a:rPr>
+              <a:t>19</a:t>
+            </a:r>
+          </a:p>
+        </p:txBody>
+      </p:sp>
+    </p:spTree>
+  </p:cSld>
+  <p:clrMapOvr>
+    <a:masterClrMapping/>
+  </p:clrMapOvr>
+</p:sld>
+</file>
+
+<file path=ppt/slides/slide2.xml><?xml version="1.0" encoding="utf-8"?>
+<p:sld xmlns:a="http://schemas.openxmlformats.org/drawingml/2006/main" xmlns:p="http://schemas.openxmlformats.org/presentationml/2006/main" xmlns:r="http://schemas.openxmlformats.org/officeDocument/2006/relationships">
+  <p:cSld>
+    <p:bg>
+      <p:bgPr>
+        <a:solidFill>
+          <a:srgbClr val="FFFFFF"/>
+        </a:solidFill>
+        <a:effectLst/>
+      </p:bgPr>
+    </p:bg>
+    <p:spTree>
+      <p:nvGrpSpPr>
+        <p:cNvPr id="1" name=""/>
+        <p:cNvGrpSpPr/>
+        <p:nvPr/>
+      </p:nvGrpSpPr>
+      <p:grpSpPr/>
+      <p:sp>
+        <p:nvSpPr>
+          <p:cNvPr id="2" name="Rectangle 1"/>
+          <p:cNvSpPr/>
+          <p:nvPr/>
+        </p:nvSpPr>
+        <p:spPr>
+          <a:xfrm>
+            <a:off x="0" y="0"/>
+            <a:ext cx="12191695" cy="1188720"/>
+          </a:xfrm>
+          <a:prstGeom prst="rect">
+            <a:avLst/>
+          </a:prstGeom>
+          <a:solidFill>
+            <a:srgbClr val="0C2340"/>
+          </a:solidFill>
+          <a:ln>
+            <a:noFill/>
+          </a:ln>
+          <a:effectLst/>
+        </p:spPr>
+        <p:style>
+          <a:lnRef idx="1">
+            <a:schemeClr val="accent1"/>
+          </a:lnRef>
+          <a:fillRef idx="3">
+            <a:schemeClr val="accent1"/>
+          </a:fillRef>
+          <a:effectRef idx="2">
+            <a:schemeClr val="accent1"/>
+          </a:effectRef>
+          <a:fontRef idx="minor">
+            <a:schemeClr val="lt1"/>
+          </a:fontRef>
+        </p:style>
+        <p:txBody>
+          <a:bodyPr rtlCol="0" anchor="ctr"/>
+          <a:lstStyle/>
+          <a:p>
+            <a:pPr algn="ctr"/>
+          </a:p>
+        </p:txBody>
+      </p:sp>
+      <p:sp>
+        <p:nvSpPr>
+          <p:cNvPr id="3" name="TextBox 2"/>
+          <p:cNvSpPr txBox="1"/>
+          <p:nvPr/>
+        </p:nvSpPr>
+        <p:spPr>
+          <a:xfrm>
+            <a:off x="640080" y="0"/>
+            <a:ext cx="9082735" cy="1188720"/>
+          </a:xfrm>
+          <a:prstGeom prst="rect">
+            <a:avLst/>
+          </a:prstGeom>
+          <a:noFill/>
+        </p:spPr>
+        <p:txBody>
+          <a:bodyPr wrap="square" anchor="ctr" lIns="0" rIns="0" tIns="0" bIns="0">
+            <a:spAutoFit/>
+          </a:bodyPr>
+          <a:lstStyle/>
+          <a:p>
+            <a:pPr algn="ctr"/>
+            <a:r>
+              <a:rPr sz="2600" b="1" i="0">
+                <a:solidFill>
+                  <a:srgbClr val="FFFFFF"/>
+                </a:solidFill>
+                <a:latin typeface="Calibri"/>
+              </a:rPr>
+              <a:t>De la matriz a las preguntas concretas</a:t>
+            </a:r>
+          </a:p>
+        </p:txBody>
+      </p:sp>
+      <p:sp>
+        <p:nvSpPr>
+          <p:cNvPr id="4" name="TextBox 3"/>
+          <p:cNvSpPr txBox="1"/>
+          <p:nvPr/>
+        </p:nvSpPr>
+        <p:spPr>
+          <a:xfrm>
+            <a:off x="640080" y="1691639"/>
+            <a:ext cx="10911535" cy="4617720"/>
+          </a:xfrm>
+          <a:prstGeom prst="rect">
+            <a:avLst/>
+          </a:prstGeom>
+          <a:noFill/>
+        </p:spPr>
+        <p:txBody>
+          <a:bodyPr wrap="square" anchor="t" lIns="0" rIns="0" tIns="0" bIns="0">
+            <a:spAutoFit/>
+          </a:bodyPr>
+          <a:lstStyle/>
+          <a:p>
+            <a:pPr>
+              <a:spcAft>
+                <a:spcPts val="1000"/>
+              </a:spcAft>
+            </a:pPr>
+            <a:r>
+              <a:rPr sz="1600" b="0" i="0">
+                <a:solidFill>
+                  <a:srgbClr val="2B2B2B"/>
+                </a:solidFill>
+                <a:latin typeface="Calibri"/>
+              </a:rPr>
+              <a:t>–   La sesión pasada quedó el plan general. Hoy contestamos algo mucho más incómodo: </a:t>
+            </a:r>
+            <a:r>
+              <a:rPr sz="1600" b="1" i="0">
+                <a:solidFill>
+                  <a:srgbClr val="2B2B2B"/>
+                </a:solidFill>
+                <a:latin typeface="Calibri"/>
+              </a:rPr>
+              <a:t>¿qué le va a preguntar a quién, y con qué palabras exactas?</a:t>
+            </a:r>
+          </a:p>
+          <a:p>
+            <a:pPr>
+              <a:spcAft>
+                <a:spcPts val="1000"/>
+              </a:spcAft>
+            </a:pPr>
+            <a:r>
+              <a:rPr sz="1600" b="0" i="0">
+                <a:solidFill>
+                  <a:srgbClr val="2B2B2B"/>
+                </a:solidFill>
+                <a:latin typeface="Calibri"/>
+              </a:rPr>
+              <a:t>–   Si en su matriz escribió 'dato: satisfacción del usuario', hoy tiene que aparecer la pregunta literal que produce ese dato.</a:t>
+            </a:r>
+          </a:p>
+          <a:p>
+            <a:pPr>
+              <a:spcAft>
+                <a:spcPts val="1000"/>
+              </a:spcAft>
+            </a:pPr>
+            <a:r>
+              <a:rPr sz="1600" b="0" i="0">
+                <a:solidFill>
+                  <a:srgbClr val="2B2B2B"/>
+                </a:solidFill>
+                <a:latin typeface="Calibri"/>
+              </a:rPr>
+              <a:t>–   Seguimos con el caso de la </a:t>
+            </a:r>
+            <a:r>
+              <a:rPr sz="1600" b="1" i="0">
+                <a:solidFill>
+                  <a:srgbClr val="2B2B2B"/>
+                </a:solidFill>
+                <a:latin typeface="Calibri"/>
+              </a:rPr>
+              <a:t>mesa de ayuda</a:t>
+            </a:r>
+            <a:r>
+              <a:rPr sz="1600" b="0" i="0">
+                <a:solidFill>
+                  <a:srgbClr val="2B2B2B"/>
+                </a:solidFill>
+                <a:latin typeface="Calibri"/>
+              </a:rPr>
+              <a:t> que clasifica tickets a mano.</a:t>
+            </a:r>
+          </a:p>
+          <a:p>
+            <a:pPr lvl="1">
+              <a:spcAft>
+                <a:spcPts val="600"/>
+              </a:spcAft>
+            </a:pPr>
+            <a:r>
+              <a:rPr sz="1500" b="0" i="0">
+                <a:solidFill>
+                  <a:srgbClr val="2B2B2B"/>
+                </a:solidFill>
+                <a:latin typeface="Calibri"/>
+              </a:rPr>
+              <a:t>●   El dato 'tiempo de atención' no cae del cielo: alguien tiene que registrar hora de apertura y hora de cierre.</a:t>
+            </a:r>
+          </a:p>
+          <a:p>
+            <a:pPr>
+              <a:spcAft>
+                <a:spcPts val="1000"/>
+              </a:spcAft>
+            </a:pPr>
+            <a:r>
+              <a:rPr sz="1600" b="0" i="0">
+                <a:solidFill>
+                  <a:srgbClr val="2B2B2B"/>
+                </a:solidFill>
+                <a:latin typeface="Calibri"/>
+              </a:rPr>
+              <a:t>–   Dos productos hoy: el </a:t>
+            </a:r>
+            <a:r>
+              <a:rPr sz="1600" b="1" i="0">
+                <a:solidFill>
+                  <a:srgbClr val="2B2B2B"/>
+                </a:solidFill>
+                <a:latin typeface="Calibri"/>
+              </a:rPr>
+              <a:t>instrumento</a:t>
+            </a:r>
+            <a:r>
+              <a:rPr sz="1600" b="0" i="0">
+                <a:solidFill>
+                  <a:srgbClr val="2B2B2B"/>
+                </a:solidFill>
+                <a:latin typeface="Calibri"/>
+              </a:rPr>
+              <a:t> (encuesta, guía, ficha o protocolo) y el </a:t>
+            </a:r>
+            <a:r>
+              <a:rPr sz="1600" b="1" i="0">
+                <a:solidFill>
+                  <a:srgbClr val="2B2B2B"/>
+                </a:solidFill>
+                <a:latin typeface="Calibri"/>
+              </a:rPr>
+              <a:t>plan de análisis</a:t>
+            </a:r>
+            <a:r>
+              <a:rPr sz="1600" b="0" i="0">
+                <a:solidFill>
+                  <a:srgbClr val="2B2B2B"/>
+                </a:solidFill>
+                <a:latin typeface="Calibri"/>
+              </a:rPr>
+              <a:t>.</a:t>
+            </a:r>
+          </a:p>
+          <a:p>
+            <a:pPr>
+              <a:spcAft>
+                <a:spcPts val="1000"/>
+              </a:spcAft>
+            </a:pPr>
+            <a:r>
+              <a:rPr sz="1600" b="0" i="0">
+                <a:solidFill>
+                  <a:srgbClr val="2B2B2B"/>
+                </a:solidFill>
+                <a:latin typeface="Calibri"/>
+              </a:rPr>
+              <a:t>–   Y la regla de TG2 sigue firme: el instrumento se </a:t>
+            </a:r>
+            <a:r>
+              <a:rPr sz="1600" b="1" i="0">
+                <a:solidFill>
+                  <a:srgbClr val="2B2B2B"/>
+                </a:solidFill>
+                <a:latin typeface="Calibri"/>
+              </a:rPr>
+              <a:t>diseña</a:t>
+            </a:r>
+            <a:r>
+              <a:rPr sz="1600" b="0" i="0">
+                <a:solidFill>
+                  <a:srgbClr val="2B2B2B"/>
+                </a:solidFill>
+                <a:latin typeface="Calibri"/>
+              </a:rPr>
+              <a:t>, no se aplica. Nadie responde nada todavía.</a:t>
+            </a:r>
+          </a:p>
+          <a:p>
+            <a:pPr lvl="1">
+              <a:spcAft>
+                <a:spcPts val="600"/>
+              </a:spcAft>
+            </a:pPr>
+            <a:r>
+              <a:rPr sz="1500" b="0" i="0">
+                <a:solidFill>
+                  <a:srgbClr val="2B2B2B"/>
+                </a:solidFill>
+                <a:latin typeface="Calibri"/>
+              </a:rPr>
+              <a:t>●   Diseñar bien hoy es lo que evita que en TG3 recoja datos que no sirven para nada.</a:t>
+            </a:r>
+          </a:p>
+        </p:txBody>
+      </p:sp>
+      <p:sp>
+        <p:nvSpPr>
+          <p:cNvPr id="5" name="TextBox 4"/>
+          <p:cNvSpPr txBox="1"/>
+          <p:nvPr/>
+        </p:nvSpPr>
+        <p:spPr>
+          <a:xfrm>
+            <a:off x="11094415" y="6446520"/>
+            <a:ext cx="548640" cy="274320"/>
+          </a:xfrm>
+          <a:prstGeom prst="rect">
+            <a:avLst/>
+          </a:prstGeom>
+          <a:noFill/>
+        </p:spPr>
+        <p:txBody>
+          <a:bodyPr wrap="square" anchor="t" lIns="0" rIns="0" tIns="0" bIns="0">
+            <a:spAutoFit/>
+          </a:bodyPr>
+          <a:lstStyle/>
+          <a:p>
+            <a:pPr algn="r"/>
+            <a:r>
+              <a:rPr sz="1000" b="1" i="0">
+                <a:solidFill>
+                  <a:srgbClr val="8F989D"/>
+                </a:solidFill>
+                <a:latin typeface="Calibri"/>
+              </a:rPr>
+              <a:t>2</a:t>
+            </a:r>
+          </a:p>
+        </p:txBody>
+      </p:sp>
+      <p:sp>
+        <p:nvSpPr>
+          <p:cNvPr id="6" name="TextBox 5"/>
+          <p:cNvSpPr txBox="1"/>
+          <p:nvPr/>
+        </p:nvSpPr>
+        <p:spPr>
+          <a:xfrm>
+            <a:off x="640080" y="5943600"/>
+            <a:ext cx="9997135" cy="457200"/>
+          </a:xfrm>
+          <a:prstGeom prst="rect">
+            <a:avLst/>
+          </a:prstGeom>
+          <a:noFill/>
+        </p:spPr>
+        <p:txBody>
+          <a:bodyPr wrap="square" anchor="t" lIns="0" rIns="0" tIns="0" bIns="0">
+            <a:spAutoFit/>
+          </a:bodyPr>
+          <a:lstStyle/>
+          <a:p>
+            <a:r>
+              <a:rPr sz="1200" b="0" i="1">
+                <a:solidFill>
+                  <a:srgbClr val="2B2B2B"/>
+                </a:solidFill>
+                <a:latin typeface="Calibri"/>
+              </a:rPr>
+              <a:t>Salida esperada: tabla de operacionalización + instrumento borrador + plan de análisis escrito.</a:t>
+            </a:r>
+          </a:p>
+        </p:txBody>
+      </p:sp>
+    </p:spTree>
+  </p:cSld>
+  <p:clrMapOvr>
+    <a:masterClrMapping/>
+  </p:clrMapOvr>
+</p:sld>
+</file>
+
+<file path=ppt/slides/slide20.xml><?xml version="1.0" encoding="utf-8"?>
+<p:sld xmlns:a="http://schemas.openxmlformats.org/drawingml/2006/main" xmlns:p="http://schemas.openxmlformats.org/presentationml/2006/main" xmlns:r="http://schemas.openxmlformats.org/officeDocument/2006/relationships">
+  <p:cSld>
+    <p:bg>
+      <p:bgPr>
+        <a:solidFill>
+          <a:srgbClr val="FFFFFF"/>
+        </a:solidFill>
+        <a:effectLst/>
+      </p:bgPr>
+    </p:bg>
+    <p:spTree>
+      <p:nvGrpSpPr>
+        <p:cNvPr id="1" name=""/>
+        <p:cNvGrpSpPr/>
+        <p:nvPr/>
+      </p:nvGrpSpPr>
+      <p:grpSpPr/>
+      <p:sp>
+        <p:nvSpPr>
+          <p:cNvPr id="2" name="Rectangle 1"/>
+          <p:cNvSpPr/>
+          <p:nvPr/>
+        </p:nvSpPr>
+        <p:spPr>
+          <a:xfrm>
+            <a:off x="0" y="0"/>
+            <a:ext cx="12191695" cy="1188720"/>
+          </a:xfrm>
+          <a:prstGeom prst="rect">
+            <a:avLst/>
+          </a:prstGeom>
+          <a:solidFill>
+            <a:srgbClr val="0C2340"/>
+          </a:solidFill>
+          <a:ln>
+            <a:noFill/>
+          </a:ln>
+          <a:effectLst/>
+        </p:spPr>
+        <p:style>
+          <a:lnRef idx="1">
+            <a:schemeClr val="accent1"/>
+          </a:lnRef>
+          <a:fillRef idx="3">
+            <a:schemeClr val="accent1"/>
+          </a:fillRef>
+          <a:effectRef idx="2">
+            <a:schemeClr val="accent1"/>
+          </a:effectRef>
+          <a:fontRef idx="minor">
+            <a:schemeClr val="lt1"/>
+          </a:fontRef>
+        </p:style>
+        <p:txBody>
+          <a:bodyPr rtlCol="0" anchor="ctr"/>
+          <a:lstStyle/>
+          <a:p>
+            <a:pPr algn="ctr"/>
+          </a:p>
+        </p:txBody>
+      </p:sp>
+      <p:sp>
+        <p:nvSpPr>
+          <p:cNvPr id="3" name="TextBox 2"/>
+          <p:cNvSpPr txBox="1"/>
+          <p:nvPr/>
+        </p:nvSpPr>
+        <p:spPr>
+          <a:xfrm>
+            <a:off x="640080" y="0"/>
+            <a:ext cx="9082735" cy="1188720"/>
+          </a:xfrm>
+          <a:prstGeom prst="rect">
+            <a:avLst/>
+          </a:prstGeom>
+          <a:noFill/>
+        </p:spPr>
+        <p:txBody>
+          <a:bodyPr wrap="square" anchor="ctr" lIns="0" rIns="0" tIns="0" bIns="0">
+            <a:spAutoFit/>
+          </a:bodyPr>
+          <a:lstStyle/>
+          <a:p>
+            <a:pPr algn="ctr"/>
+            <a:r>
+              <a:rPr sz="2600" b="1" i="0">
+                <a:solidFill>
+                  <a:srgbClr val="FFFFFF"/>
+                </a:solidFill>
+                <a:latin typeface="Calibri"/>
+              </a:rPr>
+              <a:t>RUTA DE ENTREGABLES DEL CURSO</a:t>
+            </a:r>
+          </a:p>
+        </p:txBody>
+      </p:sp>
+      <p:sp>
+        <p:nvSpPr>
+          <p:cNvPr id="4" name="TextBox 3"/>
+          <p:cNvSpPr txBox="1"/>
+          <p:nvPr/>
+        </p:nvSpPr>
+        <p:spPr>
+          <a:xfrm>
+            <a:off x="640080" y="1280160"/>
+            <a:ext cx="10911535" cy="411480"/>
+          </a:xfrm>
+          <a:prstGeom prst="rect">
+            <a:avLst/>
+          </a:prstGeom>
+          <a:noFill/>
+        </p:spPr>
+        <p:txBody>
+          <a:bodyPr wrap="square" anchor="t" lIns="0" rIns="0" tIns="0" bIns="0">
+            <a:spAutoFit/>
+          </a:bodyPr>
+          <a:lstStyle/>
+          <a:p>
+            <a:pPr algn="ctr"/>
+            <a:r>
+              <a:rPr sz="1500" b="0" i="0">
+                <a:solidFill>
+                  <a:srgbClr val="2B2B2B"/>
+                </a:solidFill>
+                <a:latin typeface="Calibri"/>
+              </a:rPr>
+              <a:t>Sin fechas a propósito: aquí va </a:t>
+            </a:r>
+            <a:r>
+              <a:rPr sz="1500" b="1" i="0">
+                <a:solidFill>
+                  <a:srgbClr val="2B2B2B"/>
+                </a:solidFill>
+                <a:latin typeface="Calibri"/>
+              </a:rPr>
+              <a:t>en qué punto del curso</a:t>
+            </a:r>
+            <a:r>
+              <a:rPr sz="1500" b="0" i="0">
+                <a:solidFill>
+                  <a:srgbClr val="2B2B2B"/>
+                </a:solidFill>
+                <a:latin typeface="Calibri"/>
+              </a:rPr>
+              <a:t> cierra cada ítem · la ventana exacta la fija CDigital</a:t>
+            </a:r>
+          </a:p>
+        </p:txBody>
+      </p:sp>
+      <p:graphicFrame>
+        <p:nvGraphicFramePr>
+          <p:cNvPr id="5" name="Table 4"/>
+          <p:cNvGraphicFramePr>
+            <a:graphicFrameLocks noGrp="1"/>
+          </p:cNvGraphicFramePr>
+          <p:nvPr/>
+        </p:nvGraphicFramePr>
+        <p:xfrm>
+          <a:off x="640080" y="2011679"/>
+          <a:ext cx="10911533" cy="4297680"/>
+        </p:xfrm>
+        <a:graphic>
+          <a:graphicData uri="http://schemas.openxmlformats.org/drawingml/2006/table">
+            <a:tbl>
+              <a:tblPr>
+                <a:tableStyleId>{2D5ABB26-0587-4C30-8999-92F81FD0307C}</a:tableStyleId>
+              </a:tblPr>
+              <a:tblGrid>
+                <a:gridCol w="2659113"/>
+                <a:gridCol w="2659113"/>
+                <a:gridCol w="5593307"/>
+              </a:tblGrid>
+              <a:tr h="477520">
+                <a:tc>
+                  <a:txBody>
+                    <a:bodyPr/>
+                    <a:lstStyle/>
+                    <a:p>
+                      <a:pPr algn="l"/>
+                      <a:r>
+                        <a:rPr sz="1300" b="1" i="0">
+                          <a:solidFill>
+                            <a:srgbClr val="FFFFFF"/>
+                          </a:solidFill>
+                          <a:latin typeface="Calibri"/>
+                        </a:rPr>
+                        <a:t>Cierra en la semana de…</a:t>
+                      </a:r>
+                    </a:p>
+                  </a:txBody>
+                  <a:tcPr anchor="ctr" marL="109728" marR="91440" marT="36576" marB="36576">
+                    <a:solidFill>
+                      <a:srgbClr val="0C2340"/>
+                    </a:solidFill>
+                  </a:tcPr>
+                </a:tc>
+                <a:tc>
+                  <a:txBody>
+                    <a:bodyPr/>
+                    <a:lstStyle/>
+                    <a:p>
+                      <a:pPr algn="l"/>
+                      <a:r>
+                        <a:rPr sz="1300" b="1" i="0">
+                          <a:solidFill>
+                            <a:srgbClr val="FFFFFF"/>
+                          </a:solidFill>
+                          <a:latin typeface="Calibri"/>
+                        </a:rPr>
+                        <a:t>Entregable</a:t>
+                      </a:r>
+                    </a:p>
+                  </a:txBody>
+                  <a:tcPr anchor="ctr" marL="109728" marR="91440" marT="36576" marB="36576">
+                    <a:solidFill>
+                      <a:srgbClr val="0C2340"/>
+                    </a:solidFill>
+                  </a:tcPr>
+                </a:tc>
+                <a:tc>
+                  <a:txBody>
+                    <a:bodyPr/>
+                    <a:lstStyle/>
+                    <a:p>
+                      <a:pPr algn="l"/>
+                      <a:r>
+                        <a:rPr sz="1300" b="1" i="0">
+                          <a:solidFill>
+                            <a:srgbClr val="FFFFFF"/>
+                          </a:solidFill>
+                          <a:latin typeface="Calibri"/>
+                        </a:rPr>
+                        <a:t>Qué debes tener listo</a:t>
+                      </a:r>
+                    </a:p>
+                  </a:txBody>
+                  <a:tcPr anchor="ctr" marL="109728" marR="91440" marT="36576" marB="36576">
+                    <a:solidFill>
+                      <a:srgbClr val="0C2340"/>
+                    </a:solidFill>
+                  </a:tcPr>
+                </a:tc>
+              </a:tr>
+              <a:tr h="477520">
+                <a:tc>
+                  <a:txBody>
+                    <a:bodyPr/>
+                    <a:lstStyle/>
+                    <a:p>
+                      <a:pPr algn="l"/>
+                      <a:r>
+                        <a:rPr sz="1100" b="1" i="0">
+                          <a:solidFill>
+                            <a:srgbClr val="2B2B2B"/>
+                          </a:solidFill>
+                          <a:latin typeface="Calibri"/>
+                        </a:rPr>
+                        <a:t>Sesión 03</a:t>
+                      </a:r>
+                      <a:r>
+                        <a:rPr sz="1100" b="0" i="0">
+                          <a:solidFill>
+                            <a:srgbClr val="2B2B2B"/>
+                          </a:solidFill>
+                          <a:latin typeface="Calibri"/>
+                        </a:rPr>
+                        <a:t> · ya cerró</a:t>
+                      </a:r>
+                    </a:p>
+                  </a:txBody>
+                  <a:tcPr anchor="ctr" marL="109728" marR="91440" marT="36576" marB="36576">
+                    <a:solidFill>
+                      <a:srgbClr val="FFFFFF"/>
+                    </a:solidFill>
+                  </a:tcPr>
+                </a:tc>
+                <a:tc>
+                  <a:txBody>
+                    <a:bodyPr/>
+                    <a:lstStyle/>
+                    <a:p>
+                      <a:pPr algn="l"/>
+                      <a:r>
+                        <a:rPr sz="1100" b="1" i="0">
+                          <a:solidFill>
+                            <a:srgbClr val="2B2B2B"/>
+                          </a:solidFill>
+                          <a:latin typeface="Calibri"/>
+                        </a:rPr>
+                        <a:t>Quiz 1</a:t>
+                      </a:r>
+                      <a:r>
+                        <a:rPr sz="1100" b="0" i="0">
+                          <a:solidFill>
+                            <a:srgbClr val="2B2B2B"/>
+                          </a:solidFill>
+                          <a:latin typeface="Calibri"/>
+                        </a:rPr>
+                        <a:t> · Cuestionario · 6%</a:t>
+                      </a:r>
+                    </a:p>
+                  </a:txBody>
+                  <a:tcPr anchor="ctr" marL="109728" marR="91440" marT="36576" marB="36576">
+                    <a:solidFill>
+                      <a:srgbClr val="FFFFFF"/>
+                    </a:solidFill>
+                  </a:tcPr>
+                </a:tc>
+                <a:tc>
+                  <a:txBody>
+                    <a:bodyPr/>
+                    <a:lstStyle/>
+                    <a:p>
+                      <a:pPr algn="l"/>
+                      <a:r>
+                        <a:rPr sz="1100" b="0" i="0">
+                          <a:solidFill>
+                            <a:srgbClr val="2B2B2B"/>
+                          </a:solidFill>
+                          <a:latin typeface="Calibri"/>
+                        </a:rPr>
+                        <a:t>Ten formulados </a:t>
+                      </a:r>
+                      <a:r>
+                        <a:rPr sz="1100" b="1" i="0">
+                          <a:solidFill>
+                            <a:srgbClr val="2B2B2B"/>
+                          </a:solidFill>
+                          <a:latin typeface="Calibri"/>
+                        </a:rPr>
+                        <a:t>pregunta, objetivos y título</a:t>
+                      </a:r>
+                      <a:r>
+                        <a:rPr sz="1100" b="0" i="0">
+                          <a:solidFill>
+                            <a:srgbClr val="2B2B2B"/>
+                          </a:solidFill>
+                          <a:latin typeface="Calibri"/>
+                        </a:rPr>
+                        <a:t> provisional.</a:t>
+                      </a:r>
+                    </a:p>
+                  </a:txBody>
+                  <a:tcPr anchor="ctr" marL="109728" marR="91440" marT="36576" marB="36576">
+                    <a:solidFill>
+                      <a:srgbClr val="FFFFFF"/>
+                    </a:solidFill>
+                  </a:tcPr>
+                </a:tc>
+              </a:tr>
+              <a:tr h="477520">
+                <a:tc>
+                  <a:txBody>
+                    <a:bodyPr/>
+                    <a:lstStyle/>
+                    <a:p>
+                      <a:pPr algn="l"/>
+                      <a:r>
+                        <a:rPr sz="1100" b="1" i="0">
+                          <a:solidFill>
+                            <a:srgbClr val="2B2B2B"/>
+                          </a:solidFill>
+                          <a:latin typeface="Calibri"/>
+                        </a:rPr>
+                        <a:t>Sesión 05</a:t>
+                      </a:r>
+                      <a:r>
+                        <a:rPr sz="1100" b="0" i="0">
+                          <a:solidFill>
+                            <a:srgbClr val="2B2B2B"/>
+                          </a:solidFill>
+                          <a:latin typeface="Calibri"/>
+                        </a:rPr>
+                        <a:t> · ya cerró</a:t>
+                      </a:r>
+                    </a:p>
+                  </a:txBody>
+                  <a:tcPr anchor="ctr" marL="109728" marR="91440" marT="36576" marB="36576">
+                    <a:solidFill>
+                      <a:srgbClr val="F2F2F2"/>
+                    </a:solidFill>
+                  </a:tcPr>
+                </a:tc>
+                <a:tc>
+                  <a:txBody>
+                    <a:bodyPr/>
+                    <a:lstStyle/>
+                    <a:p>
+                      <a:pPr algn="l"/>
+                      <a:r>
+                        <a:rPr sz="1100" b="1" i="0">
+                          <a:solidFill>
+                            <a:srgbClr val="2B2B2B"/>
+                          </a:solidFill>
+                          <a:latin typeface="Calibri"/>
+                        </a:rPr>
+                        <a:t>Parcial 1</a:t>
+                      </a:r>
+                      <a:r>
+                        <a:rPr sz="1100" b="0" i="0">
+                          <a:solidFill>
+                            <a:srgbClr val="2B2B2B"/>
+                          </a:solidFill>
+                          <a:latin typeface="Calibri"/>
+                        </a:rPr>
+                        <a:t> · Cuestionario · 24%</a:t>
+                      </a:r>
+                    </a:p>
+                  </a:txBody>
+                  <a:tcPr anchor="ctr" marL="109728" marR="91440" marT="36576" marB="36576">
+                    <a:solidFill>
+                      <a:srgbClr val="F2F2F2"/>
+                    </a:solidFill>
+                  </a:tcPr>
+                </a:tc>
+                <a:tc>
+                  <a:txBody>
+                    <a:bodyPr/>
+                    <a:lstStyle/>
+                    <a:p>
+                      <a:pPr algn="l"/>
+                      <a:r>
+                        <a:rPr sz="1100" b="0" i="0">
+                          <a:solidFill>
+                            <a:srgbClr val="2B2B2B"/>
+                          </a:solidFill>
+                          <a:latin typeface="Calibri"/>
+                        </a:rPr>
+                        <a:t>Repasa </a:t>
+                      </a:r>
+                      <a:r>
+                        <a:rPr sz="1100" b="1" i="0">
+                          <a:solidFill>
+                            <a:srgbClr val="2B2B2B"/>
+                          </a:solidFill>
+                          <a:latin typeface="Calibri"/>
+                        </a:rPr>
+                        <a:t>estructura APA CUN</a:t>
+                      </a:r>
+                      <a:r>
+                        <a:rPr sz="1100" b="0" i="0">
+                          <a:solidFill>
+                            <a:srgbClr val="2B2B2B"/>
+                          </a:solidFill>
+                          <a:latin typeface="Calibri"/>
+                        </a:rPr>
+                        <a:t> y antecedentes Fase I, más pregunta, objetivos y título.</a:t>
+                      </a:r>
+                    </a:p>
+                  </a:txBody>
+                  <a:tcPr anchor="ctr" marL="109728" marR="91440" marT="36576" marB="36576">
+                    <a:solidFill>
+                      <a:srgbClr val="F2F2F2"/>
+                    </a:solidFill>
+                  </a:tcPr>
+                </a:tc>
+              </a:tr>
+              <a:tr h="477520">
+                <a:tc>
+                  <a:txBody>
+                    <a:bodyPr/>
+                    <a:lstStyle/>
+                    <a:p>
+                      <a:pPr algn="l"/>
+                      <a:r>
+                        <a:rPr sz="1100" b="1" i="0">
+                          <a:solidFill>
+                            <a:srgbClr val="2B2B2B"/>
+                          </a:solidFill>
+                          <a:latin typeface="Calibri"/>
+                        </a:rPr>
+                        <a:t>Sesión 07</a:t>
+                      </a:r>
+                      <a:r>
+                        <a:rPr sz="1100" b="0" i="0">
+                          <a:solidFill>
+                            <a:srgbClr val="2B2B2B"/>
+                          </a:solidFill>
+                          <a:latin typeface="Calibri"/>
+                        </a:rPr>
+                        <a:t> · ya cerró</a:t>
+                      </a:r>
+                    </a:p>
+                  </a:txBody>
+                  <a:tcPr anchor="ctr" marL="109728" marR="91440" marT="36576" marB="36576">
+                    <a:solidFill>
+                      <a:srgbClr val="FFFFFF"/>
+                    </a:solidFill>
+                  </a:tcPr>
+                </a:tc>
+                <a:tc>
+                  <a:txBody>
+                    <a:bodyPr/>
+                    <a:lstStyle/>
+                    <a:p>
+                      <a:pPr algn="l"/>
+                      <a:r>
+                        <a:rPr sz="1100" b="1" i="0">
+                          <a:solidFill>
+                            <a:srgbClr val="2B2B2B"/>
+                          </a:solidFill>
+                          <a:latin typeface="Calibri"/>
+                        </a:rPr>
+                        <a:t>Quiz 2</a:t>
+                      </a:r>
+                      <a:r>
+                        <a:rPr sz="1100" b="0" i="0">
+                          <a:solidFill>
+                            <a:srgbClr val="2B2B2B"/>
+                          </a:solidFill>
+                          <a:latin typeface="Calibri"/>
+                        </a:rPr>
+                        <a:t> · Cuestionario · 9%</a:t>
+                      </a:r>
+                    </a:p>
+                  </a:txBody>
+                  <a:tcPr anchor="ctr" marL="109728" marR="91440" marT="36576" marB="36576">
+                    <a:solidFill>
+                      <a:srgbClr val="FFFFFF"/>
+                    </a:solidFill>
+                  </a:tcPr>
+                </a:tc>
+                <a:tc>
+                  <a:txBody>
+                    <a:bodyPr/>
+                    <a:lstStyle/>
+                    <a:p>
+                      <a:pPr algn="l"/>
+                      <a:r>
+                        <a:rPr sz="1100" b="0" i="0">
+                          <a:solidFill>
+                            <a:srgbClr val="2B2B2B"/>
+                          </a:solidFill>
+                          <a:latin typeface="Calibri"/>
+                        </a:rPr>
+                        <a:t>Distingue </a:t>
+                      </a:r>
+                      <a:r>
+                        <a:rPr sz="1100" b="1" i="0">
+                          <a:solidFill>
+                            <a:srgbClr val="2B2B2B"/>
+                          </a:solidFill>
+                          <a:latin typeface="Calibri"/>
+                        </a:rPr>
+                        <a:t>marco teórico, conceptual y contextual</a:t>
+                      </a:r>
+                      <a:r>
+                        <a:rPr sz="1100" b="0" i="0">
+                          <a:solidFill>
+                            <a:srgbClr val="2B2B2B"/>
+                          </a:solidFill>
+                          <a:latin typeface="Calibri"/>
+                        </a:rPr>
+                        <a:t> y cómo se articulan con tu pregunta.</a:t>
+                      </a:r>
+                    </a:p>
+                  </a:txBody>
+                  <a:tcPr anchor="ctr" marL="109728" marR="91440" marT="36576" marB="36576">
+                    <a:solidFill>
+                      <a:srgbClr val="FFFFFF"/>
+                    </a:solidFill>
+                  </a:tcPr>
+                </a:tc>
+              </a:tr>
+              <a:tr h="477520">
+                <a:tc>
+                  <a:txBody>
+                    <a:bodyPr/>
+                    <a:lstStyle/>
+                    <a:p>
+                      <a:pPr algn="l"/>
+                      <a:r>
+                        <a:rPr sz="1100" b="1" i="0">
+                          <a:solidFill>
+                            <a:srgbClr val="2B2B2B"/>
+                          </a:solidFill>
+                          <a:latin typeface="Calibri"/>
+                        </a:rPr>
+                        <a:t>Sesión 08</a:t>
+                      </a:r>
+                      <a:r>
+                        <a:rPr sz="1100" b="0" i="0">
+                          <a:solidFill>
+                            <a:srgbClr val="2B2B2B"/>
+                          </a:solidFill>
+                          <a:latin typeface="Calibri"/>
+                        </a:rPr>
+                        <a:t> · cierra esta semana</a:t>
+                      </a:r>
+                    </a:p>
+                  </a:txBody>
+                  <a:tcPr anchor="ctr" marL="109728" marR="91440" marT="36576" marB="36576">
+                    <a:solidFill>
+                      <a:srgbClr val="F2F2F2"/>
+                    </a:solidFill>
+                  </a:tcPr>
+                </a:tc>
+                <a:tc>
+                  <a:txBody>
+                    <a:bodyPr/>
+                    <a:lstStyle/>
+                    <a:p>
+                      <a:pPr algn="l"/>
+                      <a:r>
+                        <a:rPr sz="1100" b="1" i="0">
+                          <a:solidFill>
+                            <a:srgbClr val="2B2B2B"/>
+                          </a:solidFill>
+                          <a:latin typeface="Calibri"/>
+                        </a:rPr>
+                        <a:t>Parcial 2</a:t>
+                      </a:r>
+                      <a:r>
+                        <a:rPr sz="1100" b="0" i="0">
+                          <a:solidFill>
+                            <a:srgbClr val="2B2B2B"/>
+                          </a:solidFill>
+                          <a:latin typeface="Calibri"/>
+                        </a:rPr>
+                        <a:t> · Cuestionario · 21%</a:t>
+                      </a:r>
+                    </a:p>
+                  </a:txBody>
+                  <a:tcPr anchor="ctr" marL="109728" marR="91440" marT="36576" marB="36576">
+                    <a:solidFill>
+                      <a:srgbClr val="F2F2F2"/>
+                    </a:solidFill>
+                  </a:tcPr>
+                </a:tc>
+                <a:tc>
+                  <a:txBody>
+                    <a:bodyPr/>
+                    <a:lstStyle/>
+                    <a:p>
+                      <a:pPr algn="l"/>
+                      <a:r>
+                        <a:rPr sz="1100" b="0" i="0">
+                          <a:solidFill>
+                            <a:srgbClr val="2B2B2B"/>
+                          </a:solidFill>
+                          <a:latin typeface="Calibri"/>
+                        </a:rPr>
+                        <a:t>Repasa los tres marcos y el </a:t>
+                      </a:r>
+                      <a:r>
+                        <a:rPr sz="1100" b="1" i="0">
+                          <a:solidFill>
+                            <a:srgbClr val="2B2B2B"/>
+                          </a:solidFill>
+                          <a:latin typeface="Calibri"/>
+                        </a:rPr>
+                        <a:t>diseño metodológico</a:t>
+                      </a:r>
+                      <a:r>
+                        <a:rPr sz="1100" b="0" i="0">
+                          <a:solidFill>
+                            <a:srgbClr val="2B2B2B"/>
+                          </a:solidFill>
+                          <a:latin typeface="Calibri"/>
+                        </a:rPr>
+                        <a:t>: enfoque, tipo, alcance y diseño.</a:t>
+                      </a:r>
+                    </a:p>
+                  </a:txBody>
+                  <a:tcPr anchor="ctr" marL="109728" marR="91440" marT="36576" marB="36576">
+                    <a:solidFill>
+                      <a:srgbClr val="F2F2F2"/>
+                    </a:solidFill>
+                  </a:tcPr>
+                </a:tc>
+              </a:tr>
+              <a:tr h="477520">
+                <a:tc>
+                  <a:txBody>
+                    <a:bodyPr/>
+                    <a:lstStyle/>
+                    <a:p>
+                      <a:pPr algn="l"/>
+                      <a:r>
+                        <a:rPr sz="1100" b="1" i="0">
+                          <a:solidFill>
+                            <a:srgbClr val="2B2B2B"/>
+                          </a:solidFill>
+                          <a:latin typeface="Calibri"/>
+                        </a:rPr>
+                        <a:t>Sesión 10</a:t>
+                      </a:r>
+                      <a:r>
+                        <a:rPr sz="1100" b="0" i="0">
+                          <a:solidFill>
+                            <a:srgbClr val="2B2B2B"/>
+                          </a:solidFill>
+                          <a:latin typeface="Calibri"/>
+                        </a:rPr>
+                        <a:t> · pendiente</a:t>
+                      </a:r>
+                    </a:p>
+                  </a:txBody>
+                  <a:tcPr anchor="ctr" marL="109728" marR="91440" marT="36576" marB="36576">
+                    <a:solidFill>
+                      <a:srgbClr val="FFFFFF"/>
+                    </a:solidFill>
+                  </a:tcPr>
+                </a:tc>
+                <a:tc>
+                  <a:txBody>
+                    <a:bodyPr/>
+                    <a:lstStyle/>
+                    <a:p>
+                      <a:pPr algn="l"/>
+                      <a:r>
+                        <a:rPr sz="1100" b="1" i="0">
+                          <a:solidFill>
+                            <a:srgbClr val="2B2B2B"/>
+                          </a:solidFill>
+                          <a:latin typeface="Calibri"/>
+                        </a:rPr>
+                        <a:t>Quiz 3</a:t>
+                      </a:r>
+                      <a:r>
+                        <a:rPr sz="1100" b="0" i="0">
+                          <a:solidFill>
+                            <a:srgbClr val="2B2B2B"/>
+                          </a:solidFill>
+                          <a:latin typeface="Calibri"/>
+                        </a:rPr>
+                        <a:t> · Cuestionario · 4%</a:t>
+                      </a:r>
+                    </a:p>
+                  </a:txBody>
+                  <a:tcPr anchor="ctr" marL="109728" marR="91440" marT="36576" marB="36576">
+                    <a:solidFill>
+                      <a:srgbClr val="FFFFFF"/>
+                    </a:solidFill>
+                  </a:tcPr>
+                </a:tc>
+                <a:tc>
+                  <a:txBody>
+                    <a:bodyPr/>
+                    <a:lstStyle/>
+                    <a:p>
+                      <a:pPr algn="l"/>
+                      <a:r>
+                        <a:rPr sz="1100" b="0" i="0">
+                          <a:solidFill>
+                            <a:srgbClr val="2B2B2B"/>
+                          </a:solidFill>
+                          <a:latin typeface="Calibri"/>
+                        </a:rPr>
+                        <a:t>Ten claros </a:t>
+                      </a:r>
+                      <a:r>
+                        <a:rPr sz="1100" b="1" i="0">
+                          <a:solidFill>
+                            <a:srgbClr val="2B2B2B"/>
+                          </a:solidFill>
+                          <a:latin typeface="Calibri"/>
+                        </a:rPr>
+                        <a:t>instrumentos y plan de análisis</a:t>
+                      </a:r>
+                      <a:r>
+                        <a:rPr sz="1100" b="0" i="0">
+                          <a:solidFill>
+                            <a:srgbClr val="2B2B2B"/>
+                          </a:solidFill>
+                          <a:latin typeface="Calibri"/>
+                        </a:rPr>
+                        <a:t> propuestos y la integración del avance.</a:t>
+                      </a:r>
+                    </a:p>
+                  </a:txBody>
+                  <a:tcPr anchor="ctr" marL="109728" marR="91440" marT="36576" marB="36576">
+                    <a:solidFill>
+                      <a:srgbClr val="FFFFFF"/>
+                    </a:solidFill>
+                  </a:tcPr>
+                </a:tc>
+              </a:tr>
+              <a:tr h="477520">
+                <a:tc>
+                  <a:txBody>
+                    <a:bodyPr/>
+                    <a:lstStyle/>
+                    <a:p>
+                      <a:pPr algn="l"/>
+                      <a:r>
+                        <a:rPr sz="1100" b="1" i="0">
+                          <a:solidFill>
+                            <a:srgbClr val="2B2B2B"/>
+                          </a:solidFill>
+                          <a:latin typeface="Calibri"/>
+                        </a:rPr>
+                        <a:t>Sesión 11</a:t>
+                      </a:r>
+                      <a:r>
+                        <a:rPr sz="1100" b="0" i="0">
+                          <a:solidFill>
+                            <a:srgbClr val="2B2B2B"/>
+                          </a:solidFill>
+                          <a:latin typeface="Calibri"/>
+                        </a:rPr>
+                        <a:t> · pendiente</a:t>
+                      </a:r>
+                    </a:p>
+                  </a:txBody>
+                  <a:tcPr anchor="ctr" marL="109728" marR="91440" marT="36576" marB="36576">
+                    <a:solidFill>
+                      <a:srgbClr val="F2F2F2"/>
+                    </a:solidFill>
+                  </a:tcPr>
+                </a:tc>
+                <a:tc>
+                  <a:txBody>
+                    <a:bodyPr/>
+                    <a:lstStyle/>
+                    <a:p>
+                      <a:pPr algn="l"/>
+                      <a:r>
+                        <a:rPr sz="1100" b="1" i="0">
+                          <a:solidFill>
+                            <a:srgbClr val="2B2B2B"/>
+                          </a:solidFill>
+                          <a:latin typeface="Calibri"/>
+                        </a:rPr>
+                        <a:t>ACA Final</a:t>
+                      </a:r>
+                      <a:r>
+                        <a:rPr sz="1100" b="0" i="0">
+                          <a:solidFill>
+                            <a:srgbClr val="2B2B2B"/>
+                          </a:solidFill>
+                          <a:latin typeface="Calibri"/>
+                        </a:rPr>
+                        <a:t> · Tarea · 32,8%</a:t>
+                      </a:r>
+                    </a:p>
+                  </a:txBody>
+                  <a:tcPr anchor="ctr" marL="109728" marR="91440" marT="36576" marB="36576">
+                    <a:solidFill>
+                      <a:srgbClr val="F2F2F2"/>
+                    </a:solidFill>
+                  </a:tcPr>
+                </a:tc>
+                <a:tc>
+                  <a:txBody>
+                    <a:bodyPr/>
+                    <a:lstStyle/>
+                    <a:p>
+                      <a:pPr algn="l"/>
+                      <a:r>
+                        <a:rPr sz="1100" b="0" i="0">
+                          <a:solidFill>
+                            <a:srgbClr val="2B2B2B"/>
+                          </a:solidFill>
+                          <a:latin typeface="Calibri"/>
+                        </a:rPr>
+                        <a:t>Sube el </a:t>
+                      </a:r>
+                      <a:r>
+                        <a:rPr sz="1100" b="1" i="0">
+                          <a:solidFill>
+                            <a:srgbClr val="2B2B2B"/>
+                          </a:solidFill>
+                          <a:latin typeface="Calibri"/>
+                        </a:rPr>
+                        <a:t>avance consolidado</a:t>
+                      </a:r>
+                      <a:r>
+                        <a:rPr sz="1100" b="0" i="0">
+                          <a:solidFill>
+                            <a:srgbClr val="2B2B2B"/>
+                          </a:solidFill>
+                          <a:latin typeface="Calibri"/>
+                        </a:rPr>
+                        <a:t> en plantilla APA CUN, integrado y listo para TG3.</a:t>
+                      </a:r>
+                    </a:p>
+                  </a:txBody>
+                  <a:tcPr anchor="ctr" marL="109728" marR="91440" marT="36576" marB="36576">
+                    <a:solidFill>
+                      <a:srgbClr val="F2F2F2"/>
+                    </a:solidFill>
+                  </a:tcPr>
+                </a:tc>
+              </a:tr>
+              <a:tr h="477520">
+                <a:tc>
+                  <a:txBody>
+                    <a:bodyPr/>
+                    <a:lstStyle/>
+                    <a:p>
+                      <a:pPr algn="l"/>
+                      <a:r>
+                        <a:rPr sz="1100" b="1" i="0">
+                          <a:solidFill>
+                            <a:srgbClr val="2B2B2B"/>
+                          </a:solidFill>
+                          <a:latin typeface="Calibri"/>
+                        </a:rPr>
+                        <a:t>Sesión 11</a:t>
+                      </a:r>
+                      <a:r>
+                        <a:rPr sz="1100" b="0" i="0">
+                          <a:solidFill>
+                            <a:srgbClr val="2B2B2B"/>
+                          </a:solidFill>
+                          <a:latin typeface="Calibri"/>
+                        </a:rPr>
+                        <a:t> · pendiente</a:t>
+                      </a:r>
+                    </a:p>
+                  </a:txBody>
+                  <a:tcPr anchor="ctr" marL="109728" marR="91440" marT="36576" marB="36576">
+                    <a:solidFill>
+                      <a:srgbClr val="FFFFFF"/>
+                    </a:solidFill>
+                  </a:tcPr>
+                </a:tc>
+                <a:tc>
+                  <a:txBody>
+                    <a:bodyPr/>
+                    <a:lstStyle/>
+                    <a:p>
+                      <a:pPr algn="l"/>
+                      <a:r>
+                        <a:rPr sz="1100" b="1" i="0">
+                          <a:solidFill>
+                            <a:srgbClr val="2B2B2B"/>
+                          </a:solidFill>
+                          <a:latin typeface="Calibri"/>
+                        </a:rPr>
+                        <a:t>Autoevaluación</a:t>
+                      </a:r>
+                      <a:r>
+                        <a:rPr sz="1100" b="0" i="0">
+                          <a:solidFill>
+                            <a:srgbClr val="2B2B2B"/>
+                          </a:solidFill>
+                          <a:latin typeface="Calibri"/>
+                        </a:rPr>
+                        <a:t> · Cuestionario · 1,6%</a:t>
+                      </a:r>
+                    </a:p>
+                  </a:txBody>
+                  <a:tcPr anchor="ctr" marL="109728" marR="91440" marT="36576" marB="36576">
+                    <a:solidFill>
+                      <a:srgbClr val="FFFFFF"/>
+                    </a:solidFill>
+                  </a:tcPr>
+                </a:tc>
+                <a:tc>
+                  <a:txBody>
+                    <a:bodyPr/>
+                    <a:lstStyle/>
+                    <a:p>
+                      <a:pPr algn="l"/>
+                      <a:r>
+                        <a:rPr sz="1100" b="0" i="0">
+                          <a:solidFill>
+                            <a:srgbClr val="2B2B2B"/>
+                          </a:solidFill>
+                          <a:latin typeface="Calibri"/>
+                        </a:rPr>
+                        <a:t>Diligénciala tú, de forma </a:t>
+                      </a:r>
+                      <a:r>
+                        <a:rPr sz="1100" b="1" i="0">
+                          <a:solidFill>
+                            <a:srgbClr val="2B2B2B"/>
+                          </a:solidFill>
+                          <a:latin typeface="Calibri"/>
+                        </a:rPr>
+                        <a:t>individual</a:t>
+                      </a:r>
+                      <a:r>
+                        <a:rPr sz="1100" b="0" i="0">
+                          <a:solidFill>
+                            <a:srgbClr val="2B2B2B"/>
+                          </a:solidFill>
+                          <a:latin typeface="Calibri"/>
+                        </a:rPr>
+                        <a:t>, valorando tu participación real.</a:t>
+                      </a:r>
+                    </a:p>
+                  </a:txBody>
+                  <a:tcPr anchor="ctr" marL="109728" marR="91440" marT="36576" marB="36576">
+                    <a:solidFill>
+                      <a:srgbClr val="FFFFFF"/>
+                    </a:solidFill>
+                  </a:tcPr>
+                </a:tc>
+              </a:tr>
+              <a:tr h="477520">
+                <a:tc>
+                  <a:txBody>
+                    <a:bodyPr/>
+                    <a:lstStyle/>
+                    <a:p>
+                      <a:pPr algn="l"/>
+                      <a:r>
+                        <a:rPr sz="1100" b="1" i="0">
+                          <a:solidFill>
+                            <a:srgbClr val="2B2B2B"/>
+                          </a:solidFill>
+                          <a:latin typeface="Calibri"/>
+                        </a:rPr>
+                        <a:t>Sesión 11</a:t>
+                      </a:r>
+                      <a:r>
+                        <a:rPr sz="1100" b="0" i="0">
+                          <a:solidFill>
+                            <a:srgbClr val="2B2B2B"/>
+                          </a:solidFill>
+                          <a:latin typeface="Calibri"/>
+                        </a:rPr>
+                        <a:t> · pendiente</a:t>
+                      </a:r>
+                    </a:p>
+                  </a:txBody>
+                  <a:tcPr anchor="ctr" marL="109728" marR="91440" marT="36576" marB="36576">
+                    <a:solidFill>
+                      <a:srgbClr val="F2F2F2"/>
+                    </a:solidFill>
+                  </a:tcPr>
+                </a:tc>
+                <a:tc>
+                  <a:txBody>
+                    <a:bodyPr/>
+                    <a:lstStyle/>
+                    <a:p>
+                      <a:pPr algn="l"/>
+                      <a:r>
+                        <a:rPr sz="1100" b="1" i="0">
+                          <a:solidFill>
+                            <a:srgbClr val="2B2B2B"/>
+                          </a:solidFill>
+                          <a:latin typeface="Calibri"/>
+                        </a:rPr>
+                        <a:t>Coevaluación</a:t>
+                      </a:r>
+                      <a:r>
+                        <a:rPr sz="1100" b="0" i="0">
+                          <a:solidFill>
+                            <a:srgbClr val="2B2B2B"/>
+                          </a:solidFill>
+                          <a:latin typeface="Calibri"/>
+                        </a:rPr>
+                        <a:t> · Foro · 1,6%</a:t>
+                      </a:r>
+                    </a:p>
+                  </a:txBody>
+                  <a:tcPr anchor="ctr" marL="109728" marR="91440" marT="36576" marB="36576">
+                    <a:solidFill>
+                      <a:srgbClr val="F2F2F2"/>
+                    </a:solidFill>
+                  </a:tcPr>
+                </a:tc>
+                <a:tc>
+                  <a:txBody>
+                    <a:bodyPr/>
+                    <a:lstStyle/>
+                    <a:p>
+                      <a:pPr algn="l"/>
+                      <a:r>
+                        <a:rPr sz="1100" b="1" i="0">
+                          <a:solidFill>
+                            <a:srgbClr val="2B2B2B"/>
+                          </a:solidFill>
+                          <a:latin typeface="Calibri"/>
+                        </a:rPr>
+                        <a:t>Publica</a:t>
+                      </a:r>
+                      <a:r>
+                        <a:rPr sz="1100" b="0" i="0">
+                          <a:solidFill>
+                            <a:srgbClr val="2B2B2B"/>
+                          </a:solidFill>
+                          <a:latin typeface="Calibri"/>
+                        </a:rPr>
+                        <a:t> tu aporte: valora hechos del trabajo del equipo, nunca a las personas.</a:t>
+                      </a:r>
+                    </a:p>
+                  </a:txBody>
+                  <a:tcPr anchor="ctr" marL="109728" marR="91440" marT="36576" marB="36576">
+                    <a:solidFill>
+                      <a:srgbClr val="F2F2F2"/>
+                    </a:solidFill>
+                  </a:tcPr>
+                </a:tc>
+              </a:tr>
+            </a:tbl>
+          </a:graphicData>
+        </a:graphic>
+      </p:graphicFrame>
+      <p:sp>
+        <p:nvSpPr>
+          <p:cNvPr id="6" name="TextBox 5"/>
+          <p:cNvSpPr txBox="1"/>
+          <p:nvPr/>
+        </p:nvSpPr>
+        <p:spPr>
+          <a:xfrm>
+            <a:off x="640080" y="6080760"/>
+            <a:ext cx="10911535" cy="548640"/>
+          </a:xfrm>
+          <a:prstGeom prst="rect">
+            <a:avLst/>
+          </a:prstGeom>
+          <a:noFill/>
+        </p:spPr>
+        <p:txBody>
+          <a:bodyPr wrap="square" anchor="t" lIns="0" rIns="0" tIns="0" bIns="0">
+            <a:spAutoFit/>
+          </a:bodyPr>
+          <a:lstStyle/>
+          <a:p>
+            <a:r>
+              <a:rPr sz="1200" b="0" i="1">
+                <a:solidFill>
+                  <a:srgbClr val="2B2B2B"/>
+                </a:solidFill>
+                <a:latin typeface="Calibri"/>
+              </a:rPr>
+              <a:t>Esta misma tabla va al final de todas las sesiones. La </a:t>
+            </a:r>
+            <a:r>
+              <a:rPr sz="1200" b="1" i="1">
+                <a:solidFill>
+                  <a:srgbClr val="2B2B2B"/>
+                </a:solidFill>
+                <a:latin typeface="Calibri"/>
+              </a:rPr>
+              <a:t>fecha</a:t>
+            </a:r>
+            <a:r>
+              <a:rPr sz="1200" b="0" i="1">
+                <a:solidFill>
+                  <a:srgbClr val="2B2B2B"/>
+                </a:solidFill>
+                <a:latin typeface="Calibri"/>
+              </a:rPr>
+              <a:t> de cada ventana está en el enunciado del ítem (`Clases/Recursos/ACAs/`) y en el aula: si el aula y cualquier otro material se contradicen, </a:t>
+            </a:r>
+            <a:r>
+              <a:rPr sz="1200" b="1" i="1">
+                <a:solidFill>
+                  <a:srgbClr val="2B2B2B"/>
+                </a:solidFill>
+                <a:latin typeface="Calibri"/>
+              </a:rPr>
+              <a:t>manda el aula</a:t>
+            </a:r>
+            <a:r>
+              <a:rPr sz="1200" b="0" i="1">
+                <a:solidFill>
+                  <a:srgbClr val="2B2B2B"/>
+                </a:solidFill>
+                <a:latin typeface="Calibri"/>
+              </a:rPr>
+              <a:t>.</a:t>
+            </a:r>
+          </a:p>
+        </p:txBody>
+      </p:sp>
+      <p:sp>
+        <p:nvSpPr>
+          <p:cNvPr id="7" name="TextBox 6"/>
+          <p:cNvSpPr txBox="1"/>
+          <p:nvPr/>
+        </p:nvSpPr>
+        <p:spPr>
+          <a:xfrm>
+            <a:off x="11094415" y="6446520"/>
+            <a:ext cx="548640" cy="274320"/>
+          </a:xfrm>
+          <a:prstGeom prst="rect">
+            <a:avLst/>
+          </a:prstGeom>
+          <a:noFill/>
+        </p:spPr>
+        <p:txBody>
+          <a:bodyPr wrap="square" anchor="t" lIns="0" rIns="0" tIns="0" bIns="0">
+            <a:spAutoFit/>
+          </a:bodyPr>
+          <a:lstStyle/>
+          <a:p>
+            <a:pPr algn="r"/>
+            <a:r>
+              <a:rPr sz="1000" b="1" i="0">
+                <a:solidFill>
+                  <a:srgbClr val="8F989D"/>
+                </a:solidFill>
+                <a:latin typeface="Calibri"/>
+              </a:rPr>
+              <a:t>20</a:t>
+            </a:r>
+          </a:p>
+        </p:txBody>
+      </p:sp>
+    </p:spTree>
+  </p:cSld>
+  <p:clrMapOvr>
+    <a:masterClrMapping/>
+  </p:clrMapOvr>
+</p:sld>
+</file>
+
+<file path=ppt/slides/slide21.xml><?xml version="1.0" encoding="utf-8"?>
 <p:sld xmlns:a="http://schemas.openxmlformats.org/drawingml/2006/main" xmlns:p="http://schemas.openxmlformats.org/presentationml/2006/main" xmlns:r="http://schemas.openxmlformats.org/officeDocument/2006/relationships">
   <p:cSld>
     <p:bg>
@@ -7390,396 +9474,6 @@
                 <a:latin typeface="Calibri"/>
               </a:rPr>
               <a:t>TRABAJO DE GRADO 2</a:t>
-            </a:r>
-          </a:p>
-        </p:txBody>
-      </p:sp>
-    </p:spTree>
-  </p:cSld>
-  <p:clrMapOvr>
-    <a:masterClrMapping/>
-  </p:clrMapOvr>
-</p:sld>
-</file>
-
-<file path=ppt/slides/slide2.xml><?xml version="1.0" encoding="utf-8"?>
-<p:sld xmlns:a="http://schemas.openxmlformats.org/drawingml/2006/main" xmlns:p="http://schemas.openxmlformats.org/presentationml/2006/main" xmlns:r="http://schemas.openxmlformats.org/officeDocument/2006/relationships">
-  <p:cSld>
-    <p:bg>
-      <p:bgPr>
-        <a:solidFill>
-          <a:srgbClr val="FFFFFF"/>
-        </a:solidFill>
-        <a:effectLst/>
-      </p:bgPr>
-    </p:bg>
-    <p:spTree>
-      <p:nvGrpSpPr>
-        <p:cNvPr id="1" name=""/>
-        <p:cNvGrpSpPr/>
-        <p:nvPr/>
-      </p:nvGrpSpPr>
-      <p:grpSpPr/>
-      <p:sp>
-        <p:nvSpPr>
-          <p:cNvPr id="2" name="Rectangle 1"/>
-          <p:cNvSpPr/>
-          <p:nvPr/>
-        </p:nvSpPr>
-        <p:spPr>
-          <a:xfrm>
-            <a:off x="0" y="0"/>
-            <a:ext cx="12191695" cy="1188720"/>
-          </a:xfrm>
-          <a:prstGeom prst="rect">
-            <a:avLst/>
-          </a:prstGeom>
-          <a:solidFill>
-            <a:srgbClr val="0C2340"/>
-          </a:solidFill>
-          <a:ln>
-            <a:noFill/>
-          </a:ln>
-          <a:effectLst/>
-        </p:spPr>
-        <p:style>
-          <a:lnRef idx="1">
-            <a:schemeClr val="accent1"/>
-          </a:lnRef>
-          <a:fillRef idx="3">
-            <a:schemeClr val="accent1"/>
-          </a:fillRef>
-          <a:effectRef idx="2">
-            <a:schemeClr val="accent1"/>
-          </a:effectRef>
-          <a:fontRef idx="minor">
-            <a:schemeClr val="lt1"/>
-          </a:fontRef>
-        </p:style>
-        <p:txBody>
-          <a:bodyPr rtlCol="0" anchor="ctr"/>
-          <a:lstStyle/>
-          <a:p>
-            <a:pPr algn="ctr"/>
-          </a:p>
-        </p:txBody>
-      </p:sp>
-      <p:sp>
-        <p:nvSpPr>
-          <p:cNvPr id="3" name="TextBox 2"/>
-          <p:cNvSpPr txBox="1"/>
-          <p:nvPr/>
-        </p:nvSpPr>
-        <p:spPr>
-          <a:xfrm>
-            <a:off x="640080" y="0"/>
-            <a:ext cx="9082735" cy="1188720"/>
-          </a:xfrm>
-          <a:prstGeom prst="rect">
-            <a:avLst/>
-          </a:prstGeom>
-          <a:noFill/>
-        </p:spPr>
-        <p:txBody>
-          <a:bodyPr wrap="square" anchor="ctr" lIns="0" rIns="0" tIns="0" bIns="0">
-            <a:spAutoFit/>
-          </a:bodyPr>
-          <a:lstStyle/>
-          <a:p>
-            <a:pPr algn="ctr"/>
-            <a:r>
-              <a:rPr sz="2600" b="1" i="0">
-                <a:solidFill>
-                  <a:srgbClr val="FFFFFF"/>
-                </a:solidFill>
-                <a:latin typeface="Calibri"/>
-              </a:rPr>
-              <a:t>De la matriz a las preguntas concretas</a:t>
-            </a:r>
-          </a:p>
-        </p:txBody>
-      </p:sp>
-      <p:sp>
-        <p:nvSpPr>
-          <p:cNvPr id="4" name="TextBox 3"/>
-          <p:cNvSpPr txBox="1"/>
-          <p:nvPr/>
-        </p:nvSpPr>
-        <p:spPr>
-          <a:xfrm>
-            <a:off x="640080" y="1691639"/>
-            <a:ext cx="10911535" cy="4617720"/>
-          </a:xfrm>
-          <a:prstGeom prst="rect">
-            <a:avLst/>
-          </a:prstGeom>
-          <a:noFill/>
-        </p:spPr>
-        <p:txBody>
-          <a:bodyPr wrap="square" anchor="t" lIns="0" rIns="0" tIns="0" bIns="0">
-            <a:spAutoFit/>
-          </a:bodyPr>
-          <a:lstStyle/>
-          <a:p>
-            <a:pPr>
-              <a:spcAft>
-                <a:spcPts val="1000"/>
-              </a:spcAft>
-            </a:pPr>
-            <a:r>
-              <a:rPr sz="1600" b="0" i="0">
-                <a:solidFill>
-                  <a:srgbClr val="2B2B2B"/>
-                </a:solidFill>
-                <a:latin typeface="Calibri"/>
-              </a:rPr>
-              <a:t>–   La sesión pasada quedó el plan general. Hoy contestamos algo mucho más incómodo: </a:t>
-            </a:r>
-            <a:r>
-              <a:rPr sz="1600" b="1" i="0">
-                <a:solidFill>
-                  <a:srgbClr val="2B2B2B"/>
-                </a:solidFill>
-                <a:latin typeface="Calibri"/>
-              </a:rPr>
-              <a:t>¿qué le va a preguntar a quién, y con qué palabras exactas?</a:t>
-            </a:r>
-          </a:p>
-          <a:p>
-            <a:pPr>
-              <a:spcAft>
-                <a:spcPts val="1000"/>
-              </a:spcAft>
-            </a:pPr>
-            <a:r>
-              <a:rPr sz="1600" b="0" i="0">
-                <a:solidFill>
-                  <a:srgbClr val="2B2B2B"/>
-                </a:solidFill>
-                <a:latin typeface="Calibri"/>
-              </a:rPr>
-              <a:t>–   Si en su matriz escribió 'dato: satisfacción del usuario', hoy tiene que aparecer la pregunta literal que produce ese dato.</a:t>
-            </a:r>
-          </a:p>
-          <a:p>
-            <a:pPr>
-              <a:spcAft>
-                <a:spcPts val="1000"/>
-              </a:spcAft>
-            </a:pPr>
-            <a:r>
-              <a:rPr sz="1600" b="0" i="0">
-                <a:solidFill>
-                  <a:srgbClr val="2B2B2B"/>
-                </a:solidFill>
-                <a:latin typeface="Calibri"/>
-              </a:rPr>
-              <a:t>–   Seguimos con el caso de la </a:t>
-            </a:r>
-            <a:r>
-              <a:rPr sz="1600" b="1" i="0">
-                <a:solidFill>
-                  <a:srgbClr val="2B2B2B"/>
-                </a:solidFill>
-                <a:latin typeface="Calibri"/>
-              </a:rPr>
-              <a:t>mesa de ayuda</a:t>
-            </a:r>
-            <a:r>
-              <a:rPr sz="1600" b="0" i="0">
-                <a:solidFill>
-                  <a:srgbClr val="2B2B2B"/>
-                </a:solidFill>
-                <a:latin typeface="Calibri"/>
-              </a:rPr>
-              <a:t> que clasifica tickets a mano.</a:t>
-            </a:r>
-          </a:p>
-          <a:p>
-            <a:pPr lvl="1">
-              <a:spcAft>
-                <a:spcPts val="600"/>
-              </a:spcAft>
-            </a:pPr>
-            <a:r>
-              <a:rPr sz="1500" b="0" i="0">
-                <a:solidFill>
-                  <a:srgbClr val="2B2B2B"/>
-                </a:solidFill>
-                <a:latin typeface="Calibri"/>
-              </a:rPr>
-              <a:t>●   El dato 'tiempo de atención' no cae del cielo: alguien tiene que registrar hora de apertura y hora de cierre.</a:t>
-            </a:r>
-          </a:p>
-          <a:p>
-            <a:pPr>
-              <a:spcAft>
-                <a:spcPts val="1000"/>
-              </a:spcAft>
-            </a:pPr>
-            <a:r>
-              <a:rPr sz="1600" b="0" i="0">
-                <a:solidFill>
-                  <a:srgbClr val="2B2B2B"/>
-                </a:solidFill>
-                <a:latin typeface="Calibri"/>
-              </a:rPr>
-              <a:t>–   Dos productos hoy: el </a:t>
-            </a:r>
-            <a:r>
-              <a:rPr sz="1600" b="1" i="0">
-                <a:solidFill>
-                  <a:srgbClr val="2B2B2B"/>
-                </a:solidFill>
-                <a:latin typeface="Calibri"/>
-              </a:rPr>
-              <a:t>instrumento</a:t>
-            </a:r>
-            <a:r>
-              <a:rPr sz="1600" b="0" i="0">
-                <a:solidFill>
-                  <a:srgbClr val="2B2B2B"/>
-                </a:solidFill>
-                <a:latin typeface="Calibri"/>
-              </a:rPr>
-              <a:t> (encuesta, guía, ficha o protocolo) y el </a:t>
-            </a:r>
-            <a:r>
-              <a:rPr sz="1600" b="1" i="0">
-                <a:solidFill>
-                  <a:srgbClr val="2B2B2B"/>
-                </a:solidFill>
-                <a:latin typeface="Calibri"/>
-              </a:rPr>
-              <a:t>plan de análisis</a:t>
-            </a:r>
-            <a:r>
-              <a:rPr sz="1600" b="0" i="0">
-                <a:solidFill>
-                  <a:srgbClr val="2B2B2B"/>
-                </a:solidFill>
-                <a:latin typeface="Calibri"/>
-              </a:rPr>
-              <a:t>.</a:t>
-            </a:r>
-          </a:p>
-          <a:p>
-            <a:pPr>
-              <a:spcAft>
-                <a:spcPts val="1000"/>
-              </a:spcAft>
-            </a:pPr>
-            <a:r>
-              <a:rPr sz="1600" b="0" i="0">
-                <a:solidFill>
-                  <a:srgbClr val="2B2B2B"/>
-                </a:solidFill>
-                <a:latin typeface="Calibri"/>
-              </a:rPr>
-              <a:t>–   Y la regla de TG2 sigue firme: el instrumento se </a:t>
-            </a:r>
-            <a:r>
-              <a:rPr sz="1600" b="1" i="0">
-                <a:solidFill>
-                  <a:srgbClr val="2B2B2B"/>
-                </a:solidFill>
-                <a:latin typeface="Calibri"/>
-              </a:rPr>
-              <a:t>diseña</a:t>
-            </a:r>
-            <a:r>
-              <a:rPr sz="1600" b="0" i="0">
-                <a:solidFill>
-                  <a:srgbClr val="2B2B2B"/>
-                </a:solidFill>
-                <a:latin typeface="Calibri"/>
-              </a:rPr>
-              <a:t>, no se aplica. Nadie responde nada todavía.</a:t>
-            </a:r>
-          </a:p>
-          <a:p>
-            <a:pPr lvl="1">
-              <a:spcAft>
-                <a:spcPts val="600"/>
-              </a:spcAft>
-            </a:pPr>
-            <a:r>
-              <a:rPr sz="1500" b="0" i="0">
-                <a:solidFill>
-                  <a:srgbClr val="2B2B2B"/>
-                </a:solidFill>
-                <a:latin typeface="Calibri"/>
-              </a:rPr>
-              <a:t>●   Diseñar bien hoy es lo que evita que en TG3 recoja datos que no sirven para nada.</a:t>
-            </a:r>
-          </a:p>
-        </p:txBody>
-      </p:sp>
-      <p:sp>
-        <p:nvSpPr>
-          <p:cNvPr id="5" name="TextBox 4"/>
-          <p:cNvSpPr txBox="1"/>
-          <p:nvPr/>
-        </p:nvSpPr>
-        <p:spPr>
-          <a:xfrm>
-            <a:off x="11094415" y="6446520"/>
-            <a:ext cx="548640" cy="274320"/>
-          </a:xfrm>
-          <a:prstGeom prst="rect">
-            <a:avLst/>
-          </a:prstGeom>
-          <a:noFill/>
-        </p:spPr>
-        <p:txBody>
-          <a:bodyPr wrap="square" anchor="t" lIns="0" rIns="0" tIns="0" bIns="0">
-            <a:spAutoFit/>
-          </a:bodyPr>
-          <a:lstStyle/>
-          <a:p>
-            <a:pPr algn="r"/>
-            <a:r>
-              <a:rPr sz="1000" b="1" i="0">
-                <a:solidFill>
-                  <a:srgbClr val="8F989D"/>
-                </a:solidFill>
-                <a:latin typeface="Calibri"/>
-              </a:rPr>
-              <a:t>2</a:t>
-            </a:r>
-          </a:p>
-        </p:txBody>
-      </p:sp>
-      <p:sp>
-        <p:nvSpPr>
-          <p:cNvPr id="6" name="TextBox 5"/>
-          <p:cNvSpPr txBox="1"/>
-          <p:nvPr/>
-        </p:nvSpPr>
-        <p:spPr>
-          <a:xfrm>
-            <a:off x="640080" y="5943600"/>
-            <a:ext cx="9997135" cy="457200"/>
-          </a:xfrm>
-          <a:prstGeom prst="rect">
-            <a:avLst/>
-          </a:prstGeom>
-          <a:noFill/>
-        </p:spPr>
-        <p:txBody>
-          <a:bodyPr wrap="square" anchor="t" lIns="0" rIns="0" tIns="0" bIns="0">
-            <a:spAutoFit/>
-          </a:bodyPr>
-          <a:lstStyle/>
-          <a:p>
-            <a:r>
-              <a:rPr sz="1200" b="0" i="1">
-                <a:solidFill>
-                  <a:srgbClr val="2B2B2B"/>
-                </a:solidFill>
-                <a:latin typeface="Calibri"/>
-              </a:rPr>
-              <a:t>Salida esperada: tabla de operacionalización + instrumento borrador + plan de análisis escrito.</a:t>
             </a:r>
           </a:p>
         </p:txBody>
